--- a/THMS-Presentation.pptx
+++ b/THMS-Presentation.pptx
@@ -1037,7 +1037,7 @@
                 <a:ea typeface="Calibri"/>
                 <a:cs typeface="Calibri"/>
               </a:rPr>
-              <a:t>   |   Entity Framework Core   |   SQL Server   |   EfficientNet-B0</a:t>
+              <a:t>   |   Entity Framework Core   |   SQL Server   |   EfficientNet-B0 |  React.js</a:t>
             </a:r>
             <a:endParaRPr lang="en-US" sz="1300"/>
           </a:p>
@@ -3000,7 +3000,7 @@
                 <a:ea typeface="Calibri"/>
                 <a:cs typeface="Calibri"/>
               </a:rPr>
-              <a:t>URL path versioning (/api/v1/); all responses JSON</a:t>
+              <a:t>RFC 7807 Problem Details for standardized error responses</a:t>
             </a:r>
             <a:endParaRPr lang="en-US" sz="1200"/>
           </a:p>
@@ -3022,29 +3022,7 @@
                 <a:ea typeface="Calibri"/>
                 <a:cs typeface="Calibri"/>
               </a:rPr>
-              <a:t>RFC 7807 Problem Details for standardized error responses</a:t>
-            </a:r>
-            <a:endParaRPr lang="en-US" sz="1200"/>
-          </a:p>
-          <a:p>
-            <a:pPr marL="342900" indent="-342900">
-              <a:spcAft>
-                <a:spcPts val="500"/>
-              </a:spcAft>
-              <a:buSzPct val="100000"/>
-              <a:buChar char="•"/>
-              <a:defRPr/>
-            </a:pPr>
-            <a:r>
-              <a:rPr lang="en-US" sz="1200">
-                <a:solidFill>
-                  <a:srgbClr val="5B6B8C"/>
-                </a:solidFill>
-                <a:latin typeface="Calibri"/>
-                <a:ea typeface="Calibri"/>
-                <a:cs typeface="Calibri"/>
-              </a:rPr>
-              <a:t>Fully documented via OpenAPI / Swagger</a:t>
+              <a:t>Fully documented via Swagger</a:t>
             </a:r>
             <a:endParaRPr lang="en-US" sz="1200"/>
           </a:p>
@@ -5580,7 +5558,7 @@
                 <a:ea typeface="Cambria"/>
                 <a:cs typeface="Cambria"/>
               </a:rPr>
-              <a:t>60+</a:t>
+              <a:t>100+</a:t>
             </a:r>
             <a:endParaRPr lang="en-US" sz="3200"/>
           </a:p>
@@ -8845,7 +8823,7 @@
                 <a:ea typeface="Calibri"/>
                 <a:cs typeface="Calibri"/>
               </a:rPr>
-              <a:t>Clean (Onion) Architecture with a layered N-Tier pattern — dependencies always point inward.</a:t>
+              <a:t>Clean Architecture with a layered N-Tier pattern — dependencies always point inward.</a:t>
             </a:r>
             <a:endParaRPr lang="en-US" sz="1300"/>
           </a:p>
@@ -9454,7 +9432,7 @@
                 <a:ea typeface="Calibri"/>
                 <a:cs typeface="Calibri"/>
               </a:rPr>
-              <a:t>Microsoft SQL Server 2022 with EF Core 8 Code-First migrations — database: TumorHospitalDB</a:t>
+              <a:t>Microsoft SQL Server 2022 with EF Core 8 Code-First migrations — database: TumorHospital</a:t>
             </a:r>
             <a:endParaRPr lang="en-US" sz="1300"/>
           </a:p>
@@ -9690,21 +9668,10 @@
                 <a:ea typeface="Calibri"/>
                 <a:cs typeface="Calibri"/>
               </a:rPr>
-              <a:t>CharityNeed, VolunteerDonation</a:t>
-            </a:r>
-            <a:endParaRPr lang="en-US" sz="1300"/>
-          </a:p>
-          <a:p>
-            <a:pPr marL="342900" indent="-342900">
-              <a:spcAft>
-                <a:spcPts val="800"/>
-              </a:spcAft>
-              <a:buSzPct val="100000"/>
-              <a:buChar char="•"/>
-              <a:defRPr/>
-            </a:pPr>
-            <a:r>
-              <a:rPr lang="en-US" sz="1300">
+              <a:t>CharityNeed, VolunteerDonation , </a:t>
+            </a:r>
+            <a:r>
+              <a:rPr lang="en-US" sz="1300" b="0" i="0" u="none" strike="noStrike" cap="none" spc="0">
                 <a:solidFill>
                   <a:srgbClr val="5B6B8C"/>
                 </a:solidFill>
@@ -9712,9 +9679,9 @@
                 <a:ea typeface="Calibri"/>
                 <a:cs typeface="Calibri"/>
               </a:rPr>
-              <a:t>AuditLog, RefreshToken</a:t>
-            </a:r>
-            <a:endParaRPr lang="en-US" sz="1300"/>
+              <a:t>RefreshToken</a:t>
+            </a:r>
+            <a:endParaRPr sz="1300"/>
           </a:p>
         </p:txBody>
       </p:sp>
@@ -10199,7 +10166,7 @@
                 <a:ea typeface="Calibri"/>
                 <a:cs typeface="Calibri"/>
               </a:rPr>
-              <a:t>Short-lived JWT (15 min) + HttpOnly Secure refresh token (7 days) with rotation.</a:t>
+              <a:t>Short-lived JWT (15 min) + HttpOnly Secure refresh token (1 OR 30  days) with rotation.</a:t>
             </a:r>
             <a:endParaRPr lang="en-US" sz="1150"/>
           </a:p>
@@ -10350,7 +10317,7 @@
                 <a:ea typeface="Calibri"/>
                 <a:cs typeface="Calibri"/>
               </a:rPr>
-              <a:t>FluentValidation pipeline; XSS sanitization; 400 responses with field-level errors.</a:t>
+              <a:t>FluentValidation pipeline; 400 responses with field-level errors.</a:t>
             </a:r>
             <a:endParaRPr lang="en-US" sz="1150"/>
           </a:p>
@@ -10954,7 +10921,7 @@
                 <a:ea typeface="Calibri"/>
                 <a:cs typeface="Calibri"/>
               </a:rPr>
-              <a:t>AuditLog table records logins, token refreshes, role changes, payments, uploads.</a:t>
+              <a:t>AuditLog file records logins, token refreshes, role changes, payments, uploads.</a:t>
             </a:r>
             <a:endParaRPr lang="en-US" sz="1150"/>
           </a:p>

--- a/THMS-Presentation.pptx
+++ b/THMS-Presentation.pptx
@@ -19,6 +19,9 @@
     <p:sldId id="267" r:id="rId14"/>
     <p:sldId id="268" r:id="rId15"/>
     <p:sldId id="269" r:id="rId16"/>
+    <p:sldId id="270" r:id="rId17"/>
+    <p:sldId id="271" r:id="rId18"/>
+    <p:sldId id="272" r:id="rId19"/>
   </p:sldIdLst>
   <p:sldSz cx="12192000" cy="6858000"/>
   <p:notesSz cx="12192000" cy="6858000"/>
@@ -1101,6 +1104,829 @@
 
 <file path=ppt/slides/slide10.xml><?xml version="1.0" encoding="utf-8"?>
 <p:sld xmlns:a="http://schemas.openxmlformats.org/drawingml/2006/main" xmlns:r="http://schemas.openxmlformats.org/officeDocument/2006/relationships" xmlns:p="http://schemas.openxmlformats.org/presentationml/2006/main" xmlns:m="http://schemas.openxmlformats.org/officeDocument/2006/math" xmlns:w="http://schemas.openxmlformats.org/wordprocessingml/2006/main" showMasterPhAnim="0" show="1">
+  <p:cSld name="Slide 9">
+    <p:bg>
+      <p:bgPr shadeToTitle="0">
+        <a:solidFill>
+          <a:srgbClr val="FFFFFF"/>
+        </a:solidFill>
+      </p:bgPr>
+    </p:bg>
+    <p:spTree>
+      <p:nvGrpSpPr>
+        <p:cNvPr id="1" name=""/>
+        <p:cNvGrpSpPr/>
+        <p:nvPr/>
+      </p:nvGrpSpPr>
+      <p:grpSpPr bwMode="auto">
+        <a:xfrm>
+          <a:off x="0" y="0"/>
+          <a:ext cx="0" cy="0"/>
+          <a:chOff x="0" y="0"/>
+          <a:chExt cx="0" cy="0"/>
+        </a:xfrm>
+      </p:grpSpPr>
+      <p:sp>
+        <p:nvSpPr>
+          <p:cNvPr id="2" name="Text 0"/>
+          <p:cNvSpPr/>
+          <p:nvPr/>
+        </p:nvSpPr>
+        <p:spPr bwMode="auto">
+          <a:xfrm>
+            <a:off x="548640" y="365760"/>
+            <a:ext cx="9144000" cy="640080"/>
+          </a:xfrm>
+          <a:prstGeom prst="rect">
+            <a:avLst/>
+          </a:prstGeom>
+          <a:noFill/>
+          <a:ln/>
+        </p:spPr>
+        <p:txBody>
+          <a:bodyPr wrap="square" rtlCol="0" anchor="ctr"/>
+          <a:lstStyle/>
+          <a:p>
+            <a:pPr marL="0" indent="0">
+              <a:buNone/>
+              <a:defRPr/>
+            </a:pPr>
+            <a:r>
+              <a:rPr lang="en-US" sz="3000" b="1">
+                <a:solidFill>
+                  <a:srgbClr val="1E2761"/>
+                </a:solidFill>
+                <a:latin typeface="Cambria"/>
+                <a:ea typeface="Cambria"/>
+                <a:cs typeface="Cambria"/>
+              </a:rPr>
+              <a:t>MRI Classifier: Results &amp; Findings</a:t>
+            </a:r>
+            <a:endParaRPr lang="en-US" sz="3000"/>
+          </a:p>
+        </p:txBody>
+      </p:sp>
+      <p:sp>
+        <p:nvSpPr>
+          <p:cNvPr id="3" name="Shape 1"/>
+          <p:cNvSpPr/>
+          <p:nvPr/>
+        </p:nvSpPr>
+        <p:spPr bwMode="auto">
+          <a:xfrm>
+            <a:off x="548640" y="1188720"/>
+            <a:ext cx="3291840" cy="5029200"/>
+          </a:xfrm>
+          <a:prstGeom prst="roundRect">
+            <a:avLst>
+              <a:gd name="adj" fmla="val 2222"/>
+            </a:avLst>
+          </a:prstGeom>
+          <a:solidFill>
+            <a:srgbClr val="1E2761"/>
+          </a:solidFill>
+          <a:ln/>
+        </p:spPr>
+      </p:sp>
+      <p:sp>
+        <p:nvSpPr>
+          <p:cNvPr id="4" name="Text 2"/>
+          <p:cNvSpPr/>
+          <p:nvPr/>
+        </p:nvSpPr>
+        <p:spPr bwMode="auto">
+          <a:xfrm>
+            <a:off x="548640" y="1737360"/>
+            <a:ext cx="3291840" cy="1188720"/>
+          </a:xfrm>
+          <a:prstGeom prst="rect">
+            <a:avLst/>
+          </a:prstGeom>
+          <a:noFill/>
+          <a:ln/>
+        </p:spPr>
+        <p:txBody>
+          <a:bodyPr wrap="square" rtlCol="0" anchor="ctr"/>
+          <a:lstStyle/>
+          <a:p>
+            <a:pPr marL="0" indent="0" algn="ctr">
+              <a:buNone/>
+              <a:defRPr/>
+            </a:pPr>
+            <a:r>
+              <a:rPr lang="en-US" sz="6000" b="1">
+                <a:solidFill>
+                  <a:srgbClr val="FFFFFF"/>
+                </a:solidFill>
+                <a:latin typeface="Cambria"/>
+                <a:ea typeface="Cambria"/>
+                <a:cs typeface="Cambria"/>
+              </a:rPr>
+              <a:t>94.8%</a:t>
+            </a:r>
+            <a:endParaRPr lang="en-US" sz="6000"/>
+          </a:p>
+        </p:txBody>
+      </p:sp>
+      <p:sp>
+        <p:nvSpPr>
+          <p:cNvPr id="5" name="Text 3"/>
+          <p:cNvSpPr/>
+          <p:nvPr/>
+        </p:nvSpPr>
+        <p:spPr bwMode="auto">
+          <a:xfrm>
+            <a:off x="548640" y="2788920"/>
+            <a:ext cx="3291840" cy="365760"/>
+          </a:xfrm>
+          <a:prstGeom prst="rect">
+            <a:avLst/>
+          </a:prstGeom>
+          <a:noFill/>
+          <a:ln/>
+        </p:spPr>
+        <p:txBody>
+          <a:bodyPr wrap="square" rtlCol="0" anchor="ctr"/>
+          <a:lstStyle/>
+          <a:p>
+            <a:pPr marL="0" indent="0" algn="ctr">
+              <a:buNone/>
+              <a:defRPr/>
+            </a:pPr>
+            <a:r>
+              <a:rPr lang="en-US" sz="1500">
+                <a:solidFill>
+                  <a:srgbClr val="CADCFC"/>
+                </a:solidFill>
+                <a:latin typeface="Calibri"/>
+                <a:ea typeface="Calibri"/>
+                <a:cs typeface="Calibri"/>
+              </a:rPr>
+              <a:t>Overall Accuracy</a:t>
+            </a:r>
+            <a:endParaRPr lang="en-US" sz="1500"/>
+          </a:p>
+        </p:txBody>
+      </p:sp>
+      <p:sp>
+        <p:nvSpPr>
+          <p:cNvPr id="6" name="Text 4"/>
+          <p:cNvSpPr/>
+          <p:nvPr/>
+        </p:nvSpPr>
+        <p:spPr bwMode="auto">
+          <a:xfrm>
+            <a:off x="685800" y="3383280"/>
+            <a:ext cx="3017519" cy="914400"/>
+          </a:xfrm>
+          <a:prstGeom prst="rect">
+            <a:avLst/>
+          </a:prstGeom>
+          <a:noFill/>
+          <a:ln/>
+        </p:spPr>
+        <p:txBody>
+          <a:bodyPr wrap="square" rtlCol="0" anchor="ctr"/>
+          <a:lstStyle/>
+          <a:p>
+            <a:pPr marL="0" indent="0" algn="ctr">
+              <a:buNone/>
+              <a:defRPr/>
+            </a:pPr>
+            <a:r>
+              <a:rPr lang="en-US" sz="1200">
+                <a:solidFill>
+                  <a:srgbClr val="CADCFC"/>
+                </a:solidFill>
+                <a:latin typeface="Calibri"/>
+                <a:ea typeface="Calibri"/>
+                <a:cs typeface="Calibri"/>
+              </a:rPr>
+              <a:t>1,516 / 1,600 correctly</a:t>
+            </a:r>
+            <a:endParaRPr lang="en-US" sz="1200"/>
+          </a:p>
+          <a:p>
+            <a:pPr marL="0" indent="0" algn="ctr">
+              <a:buNone/>
+              <a:defRPr/>
+            </a:pPr>
+            <a:r>
+              <a:rPr lang="en-US" sz="1200">
+                <a:solidFill>
+                  <a:srgbClr val="CADCFC"/>
+                </a:solidFill>
+                <a:latin typeface="Calibri"/>
+                <a:ea typeface="Calibri"/>
+                <a:cs typeface="Calibri"/>
+              </a:rPr>
+              <a:t>classified on the held-out</a:t>
+            </a:r>
+            <a:endParaRPr lang="en-US" sz="1200"/>
+          </a:p>
+          <a:p>
+            <a:pPr marL="0" indent="0" algn="ctr">
+              <a:buNone/>
+              <a:defRPr/>
+            </a:pPr>
+            <a:r>
+              <a:rPr lang="en-US" sz="1200">
+                <a:solidFill>
+                  <a:srgbClr val="CADCFC"/>
+                </a:solidFill>
+                <a:latin typeface="Calibri"/>
+                <a:ea typeface="Calibri"/>
+                <a:cs typeface="Calibri"/>
+              </a:rPr>
+              <a:t>test set (84 errors)</a:t>
+            </a:r>
+            <a:endParaRPr lang="en-US" sz="1200"/>
+          </a:p>
+        </p:txBody>
+      </p:sp>
+      <p:sp>
+        <p:nvSpPr>
+          <p:cNvPr id="7" name="Shape 5"/>
+          <p:cNvSpPr/>
+          <p:nvPr/>
+        </p:nvSpPr>
+        <p:spPr bwMode="auto">
+          <a:xfrm>
+            <a:off x="914400" y="4480560"/>
+            <a:ext cx="2377440" cy="0"/>
+          </a:xfrm>
+          <a:prstGeom prst="line">
+            <a:avLst/>
+          </a:prstGeom>
+          <a:noFill/>
+          <a:ln w="12700">
+            <a:solidFill>
+              <a:srgbClr val="4F5C9E"/>
+            </a:solidFill>
+            <a:prstDash val="solid"/>
+          </a:ln>
+        </p:spPr>
+      </p:sp>
+      <p:sp>
+        <p:nvSpPr>
+          <p:cNvPr id="8" name="Text 6"/>
+          <p:cNvSpPr/>
+          <p:nvPr/>
+        </p:nvSpPr>
+        <p:spPr bwMode="auto">
+          <a:xfrm>
+            <a:off x="548640" y="4617720"/>
+            <a:ext cx="3291840" cy="731520"/>
+          </a:xfrm>
+          <a:prstGeom prst="rect">
+            <a:avLst/>
+          </a:prstGeom>
+          <a:noFill/>
+          <a:ln/>
+        </p:spPr>
+        <p:txBody>
+          <a:bodyPr wrap="square" rtlCol="0" anchor="ctr"/>
+          <a:lstStyle/>
+          <a:p>
+            <a:pPr marL="0" indent="0" algn="ctr">
+              <a:buNone/>
+              <a:defRPr/>
+            </a:pPr>
+            <a:r>
+              <a:rPr lang="en-US" sz="3600" b="1">
+                <a:solidFill>
+                  <a:srgbClr val="02C39A"/>
+                </a:solidFill>
+                <a:latin typeface="Cambria"/>
+                <a:ea typeface="Cambria"/>
+                <a:cs typeface="Cambria"/>
+              </a:rPr>
+              <a:t>99.3%</a:t>
+            </a:r>
+            <a:endParaRPr lang="en-US" sz="3600"/>
+          </a:p>
+        </p:txBody>
+      </p:sp>
+      <p:sp>
+        <p:nvSpPr>
+          <p:cNvPr id="9" name="Text 7"/>
+          <p:cNvSpPr/>
+          <p:nvPr/>
+        </p:nvSpPr>
+        <p:spPr bwMode="auto">
+          <a:xfrm>
+            <a:off x="685800" y="5349240"/>
+            <a:ext cx="3017519" cy="731520"/>
+          </a:xfrm>
+          <a:prstGeom prst="rect">
+            <a:avLst/>
+          </a:prstGeom>
+          <a:noFill/>
+          <a:ln/>
+        </p:spPr>
+        <p:txBody>
+          <a:bodyPr wrap="square" rtlCol="0" anchor="ctr"/>
+          <a:lstStyle/>
+          <a:p>
+            <a:pPr marL="0" indent="0" algn="ctr">
+              <a:buNone/>
+              <a:defRPr/>
+            </a:pPr>
+            <a:r>
+              <a:rPr lang="en-US" sz="1150">
+                <a:solidFill>
+                  <a:srgbClr val="CADCFC"/>
+                </a:solidFill>
+                <a:latin typeface="Calibri"/>
+                <a:ea typeface="Calibri"/>
+                <a:cs typeface="Calibri"/>
+              </a:rPr>
+              <a:t>Recall on 'notumor' class — the most</a:t>
+            </a:r>
+            <a:endParaRPr lang="en-US" sz="1150"/>
+          </a:p>
+          <a:p>
+            <a:pPr marL="0" indent="0" algn="ctr">
+              <a:buNone/>
+              <a:defRPr/>
+            </a:pPr>
+            <a:r>
+              <a:rPr lang="en-US" sz="1150">
+                <a:solidFill>
+                  <a:srgbClr val="CADCFC"/>
+                </a:solidFill>
+                <a:latin typeface="Calibri"/>
+                <a:ea typeface="Calibri"/>
+                <a:cs typeface="Calibri"/>
+              </a:rPr>
+              <a:t>clinically critical metric</a:t>
+            </a:r>
+            <a:endParaRPr lang="en-US" sz="1150"/>
+          </a:p>
+        </p:txBody>
+      </p:sp>
+      <p:sp>
+        <p:nvSpPr>
+          <p:cNvPr id="10" name="Text 8"/>
+          <p:cNvSpPr/>
+          <p:nvPr/>
+        </p:nvSpPr>
+        <p:spPr bwMode="auto">
+          <a:xfrm>
+            <a:off x="4069080" y="1188720"/>
+            <a:ext cx="3657600" cy="365760"/>
+          </a:xfrm>
+          <a:prstGeom prst="rect">
+            <a:avLst/>
+          </a:prstGeom>
+          <a:noFill/>
+          <a:ln/>
+        </p:spPr>
+        <p:txBody>
+          <a:bodyPr wrap="square" rtlCol="0" anchor="ctr"/>
+          <a:lstStyle/>
+          <a:p>
+            <a:pPr marL="0" indent="0">
+              <a:buNone/>
+              <a:defRPr/>
+            </a:pPr>
+            <a:r>
+              <a:rPr lang="en-US" sz="1600" b="1">
+                <a:solidFill>
+                  <a:srgbClr val="1E2761"/>
+                </a:solidFill>
+                <a:latin typeface="Cambria"/>
+                <a:ea typeface="Cambria"/>
+                <a:cs typeface="Cambria"/>
+              </a:rPr>
+              <a:t>Backbone Comparison</a:t>
+            </a:r>
+            <a:endParaRPr lang="en-US" sz="1600"/>
+          </a:p>
+        </p:txBody>
+      </p:sp>
+      <p:graphicFrame>
+        <p:nvGraphicFramePr>
+          <p:cNvPr id="11" name="Chart 0" descr=""/>
+          <p:cNvGraphicFramePr>
+            <a:graphicFrameLocks xmlns:a="http://schemas.openxmlformats.org/drawingml/2006/main"/>
+          </p:cNvGraphicFramePr>
+          <p:nvPr/>
+        </p:nvGraphicFramePr>
+        <p:xfrm>
+          <a:off x="4069080" y="1600200"/>
+          <a:ext cx="3657600" cy="2468880"/>
+        </p:xfrm>
+        <a:graphic>
+          <a:graphicData uri="http://schemas.openxmlformats.org/drawingml/2006/chart">
+            <c:chart xmlns:c="http://schemas.openxmlformats.org/drawingml/2006/chart" xmlns:r="http://schemas.openxmlformats.org/officeDocument/2006/relationships" r:id="rId2"/>
+          </a:graphicData>
+        </a:graphic>
+      </p:graphicFrame>
+      <p:sp>
+        <p:nvSpPr>
+          <p:cNvPr id="12" name="Text 9"/>
+          <p:cNvSpPr/>
+          <p:nvPr/>
+        </p:nvSpPr>
+        <p:spPr bwMode="auto">
+          <a:xfrm>
+            <a:off x="4069080" y="4160519"/>
+            <a:ext cx="3657600" cy="640080"/>
+          </a:xfrm>
+          <a:prstGeom prst="rect">
+            <a:avLst/>
+          </a:prstGeom>
+          <a:noFill/>
+          <a:ln/>
+        </p:spPr>
+        <p:txBody>
+          <a:bodyPr wrap="square" rtlCol="0" anchor="ctr"/>
+          <a:lstStyle/>
+          <a:p>
+            <a:pPr marL="0" indent="0">
+              <a:buNone/>
+              <a:defRPr/>
+            </a:pPr>
+            <a:r>
+              <a:rPr lang="en-US" sz="1100" i="1">
+                <a:solidFill>
+                  <a:srgbClr val="5B6B8C"/>
+                </a:solidFill>
+                <a:latin typeface="Calibri"/>
+                <a:ea typeface="Calibri"/>
+                <a:cs typeface="Calibri"/>
+              </a:rPr>
+              <a:t>EfficientNet-B0: highest accuracy with ~2.7× fewer parameters than ResNet-18 (5.3M).</a:t>
+            </a:r>
+            <a:endParaRPr lang="en-US" sz="1100"/>
+          </a:p>
+        </p:txBody>
+      </p:sp>
+      <p:sp>
+        <p:nvSpPr>
+          <p:cNvPr id="13" name="Text 10"/>
+          <p:cNvSpPr/>
+          <p:nvPr/>
+        </p:nvSpPr>
+        <p:spPr bwMode="auto">
+          <a:xfrm>
+            <a:off x="8001000" y="1188720"/>
+            <a:ext cx="3657600" cy="365760"/>
+          </a:xfrm>
+          <a:prstGeom prst="rect">
+            <a:avLst/>
+          </a:prstGeom>
+          <a:noFill/>
+          <a:ln/>
+        </p:spPr>
+        <p:txBody>
+          <a:bodyPr wrap="square" rtlCol="0" anchor="ctr"/>
+          <a:lstStyle/>
+          <a:p>
+            <a:pPr marL="0" indent="0">
+              <a:buNone/>
+              <a:defRPr/>
+            </a:pPr>
+            <a:r>
+              <a:rPr lang="en-US" sz="1600" b="1">
+                <a:solidFill>
+                  <a:srgbClr val="1E2761"/>
+                </a:solidFill>
+                <a:latin typeface="Cambria"/>
+                <a:ea typeface="Cambria"/>
+                <a:cs typeface="Cambria"/>
+              </a:rPr>
+              <a:t>Key Findings</a:t>
+            </a:r>
+            <a:endParaRPr lang="en-US" sz="1600"/>
+          </a:p>
+        </p:txBody>
+      </p:sp>
+      <p:sp>
+        <p:nvSpPr>
+          <p:cNvPr id="14" name="Shape 11"/>
+          <p:cNvSpPr/>
+          <p:nvPr/>
+        </p:nvSpPr>
+        <p:spPr bwMode="auto">
+          <a:xfrm>
+            <a:off x="8001000" y="1645920"/>
+            <a:ext cx="3611880" cy="1463040"/>
+          </a:xfrm>
+          <a:prstGeom prst="roundRect">
+            <a:avLst>
+              <a:gd name="adj" fmla="val 3750"/>
+            </a:avLst>
+          </a:prstGeom>
+          <a:solidFill>
+            <a:srgbClr val="F4F7FE"/>
+          </a:solidFill>
+          <a:ln/>
+        </p:spPr>
+      </p:sp>
+      <p:sp>
+        <p:nvSpPr>
+          <p:cNvPr id="15" name="Text 12"/>
+          <p:cNvSpPr/>
+          <p:nvPr/>
+        </p:nvSpPr>
+        <p:spPr bwMode="auto">
+          <a:xfrm>
+            <a:off x="8183880" y="1755648"/>
+            <a:ext cx="3291840" cy="365760"/>
+          </a:xfrm>
+          <a:prstGeom prst="rect">
+            <a:avLst/>
+          </a:prstGeom>
+          <a:noFill/>
+          <a:ln/>
+        </p:spPr>
+        <p:txBody>
+          <a:bodyPr wrap="square" rtlCol="0" anchor="ctr"/>
+          <a:lstStyle/>
+          <a:p>
+            <a:pPr marL="0" indent="0">
+              <a:buNone/>
+              <a:defRPr/>
+            </a:pPr>
+            <a:r>
+              <a:rPr lang="en-US" sz="1250" b="1">
+                <a:solidFill>
+                  <a:srgbClr val="1E2761"/>
+                </a:solidFill>
+                <a:latin typeface="Calibri"/>
+                <a:ea typeface="Calibri"/>
+                <a:cs typeface="Calibri"/>
+              </a:rPr>
+              <a:t>Safety-first error profile</a:t>
+            </a:r>
+            <a:endParaRPr lang="en-US" sz="1250"/>
+          </a:p>
+        </p:txBody>
+      </p:sp>
+      <p:sp>
+        <p:nvSpPr>
+          <p:cNvPr id="16" name="Text 13"/>
+          <p:cNvSpPr/>
+          <p:nvPr/>
+        </p:nvSpPr>
+        <p:spPr bwMode="auto">
+          <a:xfrm>
+            <a:off x="8183880" y="2148840"/>
+            <a:ext cx="3291840" cy="914400"/>
+          </a:xfrm>
+          <a:prstGeom prst="rect">
+            <a:avLst/>
+          </a:prstGeom>
+          <a:noFill/>
+          <a:ln/>
+        </p:spPr>
+        <p:txBody>
+          <a:bodyPr wrap="square" rtlCol="0" anchor="ctr"/>
+          <a:lstStyle/>
+          <a:p>
+            <a:pPr marL="0" indent="0">
+              <a:buNone/>
+              <a:defRPr/>
+            </a:pPr>
+            <a:r>
+              <a:rPr lang="en-US" sz="1050">
+                <a:solidFill>
+                  <a:srgbClr val="5B6B8C"/>
+                </a:solidFill>
+                <a:latin typeface="Calibri"/>
+                <a:ea typeface="Calibri"/>
+                <a:cs typeface="Calibri"/>
+              </a:rPr>
+              <a:t>99.3% recall on notumor minimizes the most harmful false negatives.</a:t>
+            </a:r>
+            <a:endParaRPr lang="en-US" sz="1050"/>
+          </a:p>
+        </p:txBody>
+      </p:sp>
+      <p:sp>
+        <p:nvSpPr>
+          <p:cNvPr id="17" name="Shape 14"/>
+          <p:cNvSpPr/>
+          <p:nvPr/>
+        </p:nvSpPr>
+        <p:spPr bwMode="auto">
+          <a:xfrm>
+            <a:off x="8001000" y="3246120"/>
+            <a:ext cx="3611880" cy="1463040"/>
+          </a:xfrm>
+          <a:prstGeom prst="roundRect">
+            <a:avLst>
+              <a:gd name="adj" fmla="val 3750"/>
+            </a:avLst>
+          </a:prstGeom>
+          <a:solidFill>
+            <a:srgbClr val="F4F7FE"/>
+          </a:solidFill>
+          <a:ln/>
+        </p:spPr>
+      </p:sp>
+      <p:sp>
+        <p:nvSpPr>
+          <p:cNvPr id="18" name="Text 15"/>
+          <p:cNvSpPr/>
+          <p:nvPr/>
+        </p:nvSpPr>
+        <p:spPr bwMode="auto">
+          <a:xfrm>
+            <a:off x="8183880" y="3355848"/>
+            <a:ext cx="3291840" cy="365760"/>
+          </a:xfrm>
+          <a:prstGeom prst="rect">
+            <a:avLst/>
+          </a:prstGeom>
+          <a:noFill/>
+          <a:ln/>
+        </p:spPr>
+        <p:txBody>
+          <a:bodyPr wrap="square" rtlCol="0" anchor="ctr"/>
+          <a:lstStyle/>
+          <a:p>
+            <a:pPr marL="0" indent="0">
+              <a:buNone/>
+              <a:defRPr/>
+            </a:pPr>
+            <a:r>
+              <a:rPr lang="en-US" sz="1250" b="1">
+                <a:solidFill>
+                  <a:srgbClr val="1E2761"/>
+                </a:solidFill>
+                <a:latin typeface="Calibri"/>
+                <a:ea typeface="Calibri"/>
+                <a:cs typeface="Calibri"/>
+              </a:rPr>
+              <a:t>Glioma↔Meningioma confusion</a:t>
+            </a:r>
+            <a:endParaRPr lang="en-US" sz="1250"/>
+          </a:p>
+        </p:txBody>
+      </p:sp>
+      <p:sp>
+        <p:nvSpPr>
+          <p:cNvPr id="19" name="Text 16"/>
+          <p:cNvSpPr/>
+          <p:nvPr/>
+        </p:nvSpPr>
+        <p:spPr bwMode="auto">
+          <a:xfrm>
+            <a:off x="8183880" y="3749040"/>
+            <a:ext cx="3291840" cy="914400"/>
+          </a:xfrm>
+          <a:prstGeom prst="rect">
+            <a:avLst/>
+          </a:prstGeom>
+          <a:noFill/>
+          <a:ln/>
+        </p:spPr>
+        <p:txBody>
+          <a:bodyPr wrap="square" rtlCol="0" anchor="ctr"/>
+          <a:lstStyle/>
+          <a:p>
+            <a:pPr marL="0" indent="0">
+              <a:buNone/>
+              <a:defRPr/>
+            </a:pPr>
+            <a:r>
+              <a:rPr lang="en-US" sz="1050">
+                <a:solidFill>
+                  <a:srgbClr val="5B6B8C"/>
+                </a:solidFill>
+                <a:latin typeface="Calibri"/>
+                <a:ea typeface="Calibri"/>
+                <a:cs typeface="Calibri"/>
+              </a:rPr>
+              <a:t>Most of the 84 errors reflect genuine visual similarity, mirroring real radiologist difficulty.</a:t>
+            </a:r>
+            <a:endParaRPr lang="en-US" sz="1050"/>
+          </a:p>
+        </p:txBody>
+      </p:sp>
+      <p:sp>
+        <p:nvSpPr>
+          <p:cNvPr id="20" name="Shape 17"/>
+          <p:cNvSpPr/>
+          <p:nvPr/>
+        </p:nvSpPr>
+        <p:spPr bwMode="auto">
+          <a:xfrm>
+            <a:off x="8001000" y="4846320"/>
+            <a:ext cx="3611880" cy="1463040"/>
+          </a:xfrm>
+          <a:prstGeom prst="roundRect">
+            <a:avLst>
+              <a:gd name="adj" fmla="val 3750"/>
+            </a:avLst>
+          </a:prstGeom>
+          <a:solidFill>
+            <a:srgbClr val="F4F7FE"/>
+          </a:solidFill>
+          <a:ln/>
+        </p:spPr>
+      </p:sp>
+      <p:sp>
+        <p:nvSpPr>
+          <p:cNvPr id="21" name="Text 18"/>
+          <p:cNvSpPr/>
+          <p:nvPr/>
+        </p:nvSpPr>
+        <p:spPr bwMode="auto">
+          <a:xfrm>
+            <a:off x="8183880" y="4956048"/>
+            <a:ext cx="3291840" cy="365760"/>
+          </a:xfrm>
+          <a:prstGeom prst="rect">
+            <a:avLst/>
+          </a:prstGeom>
+          <a:noFill/>
+          <a:ln/>
+        </p:spPr>
+        <p:txBody>
+          <a:bodyPr wrap="square" rtlCol="0" anchor="ctr"/>
+          <a:lstStyle/>
+          <a:p>
+            <a:pPr marL="0" indent="0">
+              <a:buNone/>
+              <a:defRPr/>
+            </a:pPr>
+            <a:r>
+              <a:rPr lang="en-US" sz="1250" b="1">
+                <a:solidFill>
+                  <a:srgbClr val="1E2761"/>
+                </a:solidFill>
+                <a:latin typeface="Calibri"/>
+                <a:ea typeface="Calibri"/>
+                <a:cs typeface="Calibri"/>
+              </a:rPr>
+              <a:t>Overconfidence on errors</a:t>
+            </a:r>
+            <a:endParaRPr lang="en-US" sz="1250"/>
+          </a:p>
+        </p:txBody>
+      </p:sp>
+      <p:sp>
+        <p:nvSpPr>
+          <p:cNvPr id="22" name="Text 19"/>
+          <p:cNvSpPr/>
+          <p:nvPr/>
+        </p:nvSpPr>
+        <p:spPr bwMode="auto">
+          <a:xfrm>
+            <a:off x="8183880" y="5349240"/>
+            <a:ext cx="3291840" cy="914400"/>
+          </a:xfrm>
+          <a:prstGeom prst="rect">
+            <a:avLst/>
+          </a:prstGeom>
+          <a:noFill/>
+          <a:ln/>
+        </p:spPr>
+        <p:txBody>
+          <a:bodyPr wrap="square" rtlCol="0" anchor="ctr"/>
+          <a:lstStyle/>
+          <a:p>
+            <a:pPr marL="0" indent="0">
+              <a:buNone/>
+              <a:defRPr/>
+            </a:pPr>
+            <a:r>
+              <a:rPr lang="en-US" sz="1050">
+                <a:solidFill>
+                  <a:srgbClr val="5B6B8C"/>
+                </a:solidFill>
+                <a:latin typeface="Calibri"/>
+                <a:ea typeface="Calibri"/>
+                <a:cs typeface="Calibri"/>
+              </a:rPr>
+              <a:t>Cross-entropy loss yields sharp, miscalibrated probabilities — confidence is never shown to users.</a:t>
+            </a:r>
+            <a:endParaRPr lang="en-US" sz="1050"/>
+          </a:p>
+        </p:txBody>
+      </p:sp>
+    </p:spTree>
+  </p:cSld>
+  <p:clrMapOvr>
+    <a:masterClrMapping/>
+  </p:clrMapOvr>
+  <mc:AlternateContent xmlns:mc="http://schemas.openxmlformats.org/markup-compatibility/2006">
+    <mc:Choice xmlns:p14="http://schemas.microsoft.com/office/powerpoint/2010/main" Requires="p14">
+      <p:transition p14:dur="2000" advClick="1"/>
+    </mc:Choice>
+    <mc:Fallback>
+      <p:transition advClick="1"/>
+    </mc:Fallback>
+  </mc:AlternateContent>
+</p:sld>
+</file>
+
+<file path=ppt/slides/slide11.xml><?xml version="1.0" encoding="utf-8"?>
+<p:sld xmlns:a="http://schemas.openxmlformats.org/drawingml/2006/main" xmlns:r="http://schemas.openxmlformats.org/officeDocument/2006/relationships" xmlns:p="http://schemas.openxmlformats.org/presentationml/2006/main" xmlns:m="http://schemas.openxmlformats.org/officeDocument/2006/math" xmlns:w="http://schemas.openxmlformats.org/wordprocessingml/2006/main" showMasterPhAnim="0" show="1">
   <p:cSld name="Slide 10">
     <p:bg>
       <p:bgPr shadeToTitle="0">
@@ -2178,7 +3004,7 @@
 </p:sld>
 </file>
 
-<file path=ppt/slides/slide11.xml><?xml version="1.0" encoding="utf-8"?>
+<file path=ppt/slides/slide12.xml><?xml version="1.0" encoding="utf-8"?>
 <p:sld xmlns:a="http://schemas.openxmlformats.org/drawingml/2006/main" xmlns:r="http://schemas.openxmlformats.org/officeDocument/2006/relationships" xmlns:p="http://schemas.openxmlformats.org/presentationml/2006/main" xmlns:m="http://schemas.openxmlformats.org/officeDocument/2006/math" xmlns:w="http://schemas.openxmlformats.org/wordprocessingml/2006/main" showMasterPhAnim="0" show="1">
   <p:cSld name="Slide 11">
     <p:bg>
@@ -3287,7 +4113,2213 @@
 </p:sld>
 </file>
 
-<file path=ppt/slides/slide12.xml><?xml version="1.0" encoding="utf-8"?>
+<file path=ppt/slides/slide13.xml><?xml version="1.0" encoding="utf-8"?>
+<p:sld xmlns:a="http://schemas.openxmlformats.org/drawingml/2006/main" xmlns:r="http://schemas.openxmlformats.org/officeDocument/2006/relationships" xmlns:p="http://schemas.openxmlformats.org/presentationml/2006/main" xmlns:m="http://schemas.openxmlformats.org/officeDocument/2006/math" xmlns:w="http://schemas.openxmlformats.org/wordprocessingml/2006/main" showMasterPhAnim="0" show="1">
+  <p:cSld name="Slide 17">
+    <p:bg>
+      <p:bgPr shadeToTitle="0">
+        <a:solidFill>
+          <a:srgbClr val="FFFFFF"/>
+        </a:solidFill>
+      </p:bgPr>
+    </p:bg>
+    <p:spTree>
+      <p:nvGrpSpPr>
+        <p:cNvPr id="1" name=""/>
+        <p:cNvGrpSpPr/>
+        <p:nvPr/>
+      </p:nvGrpSpPr>
+      <p:grpSpPr bwMode="auto">
+        <a:xfrm>
+          <a:off x="0" y="0"/>
+          <a:ext cx="0" cy="0"/>
+          <a:chOff x="0" y="0"/>
+          <a:chExt cx="0" cy="0"/>
+        </a:xfrm>
+      </p:grpSpPr>
+      <p:sp>
+        <p:nvSpPr>
+          <p:cNvPr id="2" name="Title"/>
+          <p:cNvSpPr/>
+          <p:nvPr/>
+        </p:nvSpPr>
+        <p:spPr bwMode="auto">
+          <a:xfrm>
+            <a:off x="548640" y="320040"/>
+            <a:ext cx="7315200" cy="594360"/>
+          </a:xfrm>
+          <a:prstGeom prst="rect">
+            <a:avLst/>
+          </a:prstGeom>
+          <a:noFill/>
+          <a:ln/>
+        </p:spPr>
+        <p:txBody>
+          <a:bodyPr wrap="square" rtlCol="0" anchor="ctr"/>
+          <a:lstStyle/>
+          <a:p>
+            <a:pPr marL="0" indent="0">
+              <a:buNone/>
+              <a:defRPr/>
+            </a:pPr>
+            <a:r>
+              <a:rPr lang="en-US" sz="3200" b="1">
+                <a:solidFill>
+                  <a:srgbClr val="1E2761"/>
+                </a:solidFill>
+                <a:latin typeface="Cambria"/>
+              </a:rPr>
+              <a:t>Form Validation</a:t>
+            </a:r>
+            <a:endParaRPr/>
+          </a:p>
+        </p:txBody>
+      </p:sp>
+      <p:sp>
+        <p:nvSpPr>
+          <p:cNvPr id="3" name="Subtitle"/>
+          <p:cNvSpPr/>
+          <p:nvPr/>
+        </p:nvSpPr>
+        <p:spPr bwMode="auto">
+          <a:xfrm>
+            <a:off x="548640" y="880560"/>
+            <a:ext cx="10950480" cy="411480"/>
+          </a:xfrm>
+          <a:prstGeom prst="rect">
+            <a:avLst/>
+          </a:prstGeom>
+          <a:noFill/>
+          <a:ln/>
+        </p:spPr>
+        <p:txBody>
+          <a:bodyPr wrap="square" rtlCol="0" anchor="ctr"/>
+          <a:lstStyle/>
+          <a:p>
+            <a:pPr marL="0" indent="0">
+              <a:buNone/>
+              <a:defRPr/>
+            </a:pPr>
+            <a:r>
+              <a:rPr lang="en-US" sz="1200" i="1">
+                <a:solidFill>
+                  <a:srgbClr val="5B6B8C"/>
+                </a:solidFill>
+                <a:latin typeface="Calibri"/>
+              </a:rPr>
+              <a:t>Validation is performed before sending data to the server, reducing unnecessary requests and improving user experience.</a:t>
+            </a:r>
+            <a:endParaRPr/>
+          </a:p>
+        </p:txBody>
+      </p:sp>
+      <p:sp>
+        <p:nvSpPr>
+          <p:cNvPr id="4" name="LeftCard"/>
+          <p:cNvSpPr/>
+          <p:nvPr/>
+        </p:nvSpPr>
+        <p:spPr bwMode="auto">
+          <a:xfrm>
+            <a:off x="548640" y="1417320"/>
+            <a:ext cx="4389120" cy="4937400"/>
+          </a:xfrm>
+          <a:prstGeom prst="roundRect">
+            <a:avLst>
+              <a:gd name="adj" fmla="val 2000"/>
+            </a:avLst>
+          </a:prstGeom>
+          <a:solidFill>
+            <a:srgbClr val="F4F7FE"/>
+          </a:solidFill>
+          <a:ln/>
+        </p:spPr>
+      </p:sp>
+      <p:sp>
+        <p:nvSpPr>
+          <p:cNvPr id="5" name="LeftHeader"/>
+          <p:cNvSpPr/>
+          <p:nvPr/>
+        </p:nvSpPr>
+        <p:spPr bwMode="auto">
+          <a:xfrm>
+            <a:off x="731520" y="1554480"/>
+            <a:ext cx="4023360" cy="365760"/>
+          </a:xfrm>
+          <a:prstGeom prst="rect">
+            <a:avLst/>
+          </a:prstGeom>
+          <a:noFill/>
+          <a:ln/>
+        </p:spPr>
+        <p:txBody>
+          <a:bodyPr wrap="square" rtlCol="0" anchor="ctr"/>
+          <a:lstStyle/>
+          <a:p>
+            <a:pPr marL="0" indent="0">
+              <a:buNone/>
+              <a:defRPr/>
+            </a:pPr>
+            <a:r>
+              <a:rPr lang="en-US" sz="1600" b="1">
+                <a:solidFill>
+                  <a:srgbClr val="1E2761"/>
+                </a:solidFill>
+                <a:latin typeface="Cambria"/>
+              </a:rPr>
+              <a:t>Validation Rules</a:t>
+            </a:r>
+            <a:endParaRPr/>
+          </a:p>
+        </p:txBody>
+      </p:sp>
+      <p:sp>
+        <p:nvSpPr>
+          <p:cNvPr id="6" name="Dot1"/>
+          <p:cNvSpPr/>
+          <p:nvPr/>
+        </p:nvSpPr>
+        <p:spPr bwMode="auto">
+          <a:xfrm>
+            <a:off x="777240" y="2057400"/>
+            <a:ext cx="182880" cy="182880"/>
+          </a:xfrm>
+          <a:prstGeom prst="ellipse">
+            <a:avLst/>
+          </a:prstGeom>
+          <a:solidFill>
+            <a:srgbClr val="1E2761"/>
+          </a:solidFill>
+          <a:ln/>
+        </p:spPr>
+      </p:sp>
+      <p:sp>
+        <p:nvSpPr>
+          <p:cNvPr id="7" name="Rule1Title"/>
+          <p:cNvSpPr/>
+          <p:nvPr/>
+        </p:nvSpPr>
+        <p:spPr bwMode="auto">
+          <a:xfrm>
+            <a:off x="1051560" y="2011680"/>
+            <a:ext cx="3657600" cy="274320"/>
+          </a:xfrm>
+          <a:prstGeom prst="rect">
+            <a:avLst/>
+          </a:prstGeom>
+          <a:noFill/>
+          <a:ln/>
+        </p:spPr>
+        <p:txBody>
+          <a:bodyPr wrap="square" rtlCol="0" anchor="ctr"/>
+          <a:lstStyle/>
+          <a:p>
+            <a:pPr marL="0" indent="0">
+              <a:buNone/>
+              <a:defRPr/>
+            </a:pPr>
+            <a:r>
+              <a:rPr lang="en-US" sz="1300" b="1">
+                <a:solidFill>
+                  <a:srgbClr val="1E2761"/>
+                </a:solidFill>
+                <a:latin typeface="Calibri"/>
+              </a:rPr>
+              <a:t>Required Field Validation</a:t>
+            </a:r>
+            <a:endParaRPr/>
+          </a:p>
+        </p:txBody>
+      </p:sp>
+      <p:sp>
+        <p:nvSpPr>
+          <p:cNvPr id="8" name="Rule1Desc"/>
+          <p:cNvSpPr/>
+          <p:nvPr/>
+        </p:nvSpPr>
+        <p:spPr bwMode="auto">
+          <a:xfrm>
+            <a:off x="1051560" y="2286000"/>
+            <a:ext cx="3657600" cy="228600"/>
+          </a:xfrm>
+          <a:prstGeom prst="rect">
+            <a:avLst/>
+          </a:prstGeom>
+          <a:noFill/>
+          <a:ln/>
+        </p:spPr>
+        <p:txBody>
+          <a:bodyPr wrap="square" rtlCol="0" anchor="t"/>
+          <a:lstStyle/>
+          <a:p>
+            <a:pPr marL="0" indent="0">
+              <a:buNone/>
+              <a:defRPr/>
+            </a:pPr>
+            <a:r>
+              <a:rPr lang="en-US" sz="1050">
+                <a:solidFill>
+                  <a:srgbClr val="5B6B8C"/>
+                </a:solidFill>
+                <a:latin typeface="Calibri"/>
+              </a:rPr>
+              <a:t>All fields must be filled before submission is allowed.</a:t>
+            </a:r>
+            <a:endParaRPr/>
+          </a:p>
+        </p:txBody>
+      </p:sp>
+      <p:sp>
+        <p:nvSpPr>
+          <p:cNvPr id="9" name="Dot2"/>
+          <p:cNvSpPr/>
+          <p:nvPr/>
+        </p:nvSpPr>
+        <p:spPr bwMode="auto">
+          <a:xfrm>
+            <a:off x="777240" y="2651760"/>
+            <a:ext cx="182880" cy="182880"/>
+          </a:xfrm>
+          <a:prstGeom prst="ellipse">
+            <a:avLst/>
+          </a:prstGeom>
+          <a:solidFill>
+            <a:srgbClr val="1E2761"/>
+          </a:solidFill>
+          <a:ln/>
+        </p:spPr>
+      </p:sp>
+      <p:sp>
+        <p:nvSpPr>
+          <p:cNvPr id="10" name="Rule2Title"/>
+          <p:cNvSpPr/>
+          <p:nvPr/>
+        </p:nvSpPr>
+        <p:spPr bwMode="auto">
+          <a:xfrm>
+            <a:off x="1051560" y="2606040"/>
+            <a:ext cx="3657600" cy="274320"/>
+          </a:xfrm>
+          <a:prstGeom prst="rect">
+            <a:avLst/>
+          </a:prstGeom>
+          <a:noFill/>
+          <a:ln/>
+        </p:spPr>
+        <p:txBody>
+          <a:bodyPr wrap="square" rtlCol="0" anchor="ctr"/>
+          <a:lstStyle/>
+          <a:p>
+            <a:pPr marL="0" indent="0">
+              <a:buNone/>
+              <a:defRPr/>
+            </a:pPr>
+            <a:r>
+              <a:rPr lang="en-US" sz="1300" b="1">
+                <a:solidFill>
+                  <a:srgbClr val="1E2761"/>
+                </a:solidFill>
+                <a:latin typeface="Calibri"/>
+              </a:rPr>
+              <a:t>Email Format Validation</a:t>
+            </a:r>
+            <a:endParaRPr/>
+          </a:p>
+        </p:txBody>
+      </p:sp>
+      <p:sp>
+        <p:nvSpPr>
+          <p:cNvPr id="11" name="Rule2Desc"/>
+          <p:cNvSpPr/>
+          <p:nvPr/>
+        </p:nvSpPr>
+        <p:spPr bwMode="auto">
+          <a:xfrm>
+            <a:off x="1051560" y="2880360"/>
+            <a:ext cx="3657600" cy="228600"/>
+          </a:xfrm>
+          <a:prstGeom prst="rect">
+            <a:avLst/>
+          </a:prstGeom>
+          <a:noFill/>
+          <a:ln/>
+        </p:spPr>
+        <p:txBody>
+          <a:bodyPr wrap="square" rtlCol="0" anchor="t"/>
+          <a:lstStyle/>
+          <a:p>
+            <a:pPr marL="0" indent="0">
+              <a:buNone/>
+              <a:defRPr/>
+            </a:pPr>
+            <a:r>
+              <a:rPr lang="en-US" sz="1050">
+                <a:solidFill>
+                  <a:srgbClr val="5B6B8C"/>
+                </a:solidFill>
+                <a:latin typeface="Calibri"/>
+              </a:rPr>
+              <a:t>Input must match standard email pattern (e.g. user@domain.com).</a:t>
+            </a:r>
+            <a:endParaRPr/>
+          </a:p>
+        </p:txBody>
+      </p:sp>
+      <p:sp>
+        <p:nvSpPr>
+          <p:cNvPr id="12" name="Dot3"/>
+          <p:cNvSpPr/>
+          <p:nvPr/>
+        </p:nvSpPr>
+        <p:spPr bwMode="auto">
+          <a:xfrm>
+            <a:off x="777240" y="3246120"/>
+            <a:ext cx="182880" cy="182880"/>
+          </a:xfrm>
+          <a:prstGeom prst="ellipse">
+            <a:avLst/>
+          </a:prstGeom>
+          <a:solidFill>
+            <a:srgbClr val="1E2761"/>
+          </a:solidFill>
+          <a:ln/>
+        </p:spPr>
+      </p:sp>
+      <p:sp>
+        <p:nvSpPr>
+          <p:cNvPr id="13" name="Rule3Title"/>
+          <p:cNvSpPr/>
+          <p:nvPr/>
+        </p:nvSpPr>
+        <p:spPr bwMode="auto">
+          <a:xfrm>
+            <a:off x="1051560" y="3200400"/>
+            <a:ext cx="3657600" cy="274320"/>
+          </a:xfrm>
+          <a:prstGeom prst="rect">
+            <a:avLst/>
+          </a:prstGeom>
+          <a:noFill/>
+          <a:ln/>
+        </p:spPr>
+        <p:txBody>
+          <a:bodyPr wrap="square" rtlCol="0" anchor="ctr"/>
+          <a:lstStyle/>
+          <a:p>
+            <a:pPr marL="0" indent="0">
+              <a:buNone/>
+              <a:defRPr/>
+            </a:pPr>
+            <a:r>
+              <a:rPr lang="en-US" sz="1300" b="1">
+                <a:solidFill>
+                  <a:srgbClr val="1E2761"/>
+                </a:solidFill>
+                <a:latin typeface="Calibri"/>
+              </a:rPr>
+              <a:t>Password Requirements</a:t>
+            </a:r>
+            <a:endParaRPr/>
+          </a:p>
+        </p:txBody>
+      </p:sp>
+      <p:sp>
+        <p:nvSpPr>
+          <p:cNvPr id="14" name="Rule3Desc"/>
+          <p:cNvSpPr/>
+          <p:nvPr/>
+        </p:nvSpPr>
+        <p:spPr bwMode="auto">
+          <a:xfrm>
+            <a:off x="1051560" y="3474720"/>
+            <a:ext cx="3657600" cy="274320"/>
+          </a:xfrm>
+          <a:prstGeom prst="rect">
+            <a:avLst/>
+          </a:prstGeom>
+          <a:noFill/>
+          <a:ln/>
+        </p:spPr>
+        <p:txBody>
+          <a:bodyPr wrap="square" rtlCol="0" anchor="t"/>
+          <a:lstStyle/>
+          <a:p>
+            <a:pPr marL="0" indent="0">
+              <a:buNone/>
+              <a:defRPr/>
+            </a:pPr>
+            <a:r>
+              <a:rPr lang="en-US" sz="1050">
+                <a:solidFill>
+                  <a:srgbClr val="5B6B8C"/>
+                </a:solidFill>
+                <a:latin typeface="Calibri"/>
+              </a:rPr>
+              <a:t>Minimum 8 characters, at least one uppercase letter, one number, and one special character.</a:t>
+            </a:r>
+            <a:endParaRPr/>
+          </a:p>
+        </p:txBody>
+      </p:sp>
+      <p:sp>
+        <p:nvSpPr>
+          <p:cNvPr id="15" name="Dot4"/>
+          <p:cNvSpPr/>
+          <p:nvPr/>
+        </p:nvSpPr>
+        <p:spPr bwMode="auto">
+          <a:xfrm>
+            <a:off x="777240" y="3886200"/>
+            <a:ext cx="182880" cy="182880"/>
+          </a:xfrm>
+          <a:prstGeom prst="ellipse">
+            <a:avLst/>
+          </a:prstGeom>
+          <a:solidFill>
+            <a:srgbClr val="1E2761"/>
+          </a:solidFill>
+          <a:ln/>
+        </p:spPr>
+      </p:sp>
+      <p:sp>
+        <p:nvSpPr>
+          <p:cNvPr id="16" name="Rule4Title"/>
+          <p:cNvSpPr/>
+          <p:nvPr/>
+        </p:nvSpPr>
+        <p:spPr bwMode="auto">
+          <a:xfrm>
+            <a:off x="1051560" y="3840480"/>
+            <a:ext cx="3657600" cy="274320"/>
+          </a:xfrm>
+          <a:prstGeom prst="rect">
+            <a:avLst/>
+          </a:prstGeom>
+          <a:noFill/>
+          <a:ln/>
+        </p:spPr>
+        <p:txBody>
+          <a:bodyPr wrap="square" rtlCol="0" anchor="ctr"/>
+          <a:lstStyle/>
+          <a:p>
+            <a:pPr marL="0" indent="0">
+              <a:buNone/>
+              <a:defRPr/>
+            </a:pPr>
+            <a:r>
+              <a:rPr lang="en-US" sz="1300" b="1">
+                <a:solidFill>
+                  <a:srgbClr val="1E2761"/>
+                </a:solidFill>
+                <a:latin typeface="Calibri"/>
+              </a:rPr>
+              <a:t>Error Messages</a:t>
+            </a:r>
+            <a:endParaRPr/>
+          </a:p>
+        </p:txBody>
+      </p:sp>
+      <p:sp>
+        <p:nvSpPr>
+          <p:cNvPr id="17" name="Rule4Desc"/>
+          <p:cNvSpPr/>
+          <p:nvPr/>
+        </p:nvSpPr>
+        <p:spPr bwMode="auto">
+          <a:xfrm>
+            <a:off x="1051560" y="4114800"/>
+            <a:ext cx="3657600" cy="228600"/>
+          </a:xfrm>
+          <a:prstGeom prst="rect">
+            <a:avLst/>
+          </a:prstGeom>
+          <a:noFill/>
+          <a:ln/>
+        </p:spPr>
+        <p:txBody>
+          <a:bodyPr wrap="square" rtlCol="0" anchor="t"/>
+          <a:lstStyle/>
+          <a:p>
+            <a:pPr marL="0" indent="0">
+              <a:buNone/>
+              <a:defRPr/>
+            </a:pPr>
+            <a:r>
+              <a:rPr lang="en-US" sz="1050">
+                <a:solidFill>
+                  <a:srgbClr val="5B6B8C"/>
+                </a:solidFill>
+                <a:latin typeface="Calibri"/>
+              </a:rPr>
+              <a:t>Inline, field-level errors shown in real time as the user types or on blur.</a:t>
+            </a:r>
+            <a:endParaRPr/>
+          </a:p>
+        </p:txBody>
+      </p:sp>
+      <p:sp>
+        <p:nvSpPr>
+          <p:cNvPr id="18" name="FormCard"/>
+          <p:cNvSpPr/>
+          <p:nvPr/>
+        </p:nvSpPr>
+        <p:spPr bwMode="auto">
+          <a:xfrm>
+            <a:off x="5303520" y="1417320"/>
+            <a:ext cx="6195600" cy="4937400"/>
+          </a:xfrm>
+          <a:prstGeom prst="roundRect">
+            <a:avLst>
+              <a:gd name="adj" fmla="val 1500"/>
+            </a:avLst>
+          </a:prstGeom>
+          <a:solidFill>
+            <a:srgbClr val="1E2761"/>
+          </a:solidFill>
+          <a:ln/>
+        </p:spPr>
+      </p:sp>
+      <p:sp>
+        <p:nvSpPr>
+          <p:cNvPr id="19" name="FormLabel"/>
+          <p:cNvSpPr/>
+          <p:nvPr/>
+        </p:nvSpPr>
+        <p:spPr bwMode="auto">
+          <a:xfrm>
+            <a:off x="5486400" y="1554480"/>
+            <a:ext cx="5829840" cy="365760"/>
+          </a:xfrm>
+          <a:prstGeom prst="rect">
+            <a:avLst/>
+          </a:prstGeom>
+          <a:noFill/>
+          <a:ln/>
+        </p:spPr>
+        <p:txBody>
+          <a:bodyPr wrap="square" rtlCol="0" anchor="ctr"/>
+          <a:lstStyle/>
+          <a:p>
+            <a:pPr algn="ctr">
+              <a:buNone/>
+              <a:defRPr/>
+            </a:pPr>
+            <a:r>
+              <a:rPr lang="en-US" sz="1400" b="1">
+                <a:solidFill>
+                  <a:srgbClr val="FFFFFF"/>
+                </a:solidFill>
+                <a:latin typeface="Cambria"/>
+              </a:rPr>
+              <a:t>Login / Register Form</a:t>
+            </a:r>
+            <a:endParaRPr/>
+          </a:p>
+        </p:txBody>
+      </p:sp>
+      <p:sp>
+        <p:nvSpPr>
+          <p:cNvPr id="20" name="Field1Box"/>
+          <p:cNvSpPr/>
+          <p:nvPr/>
+        </p:nvSpPr>
+        <p:spPr bwMode="auto">
+          <a:xfrm>
+            <a:off x="5577840" y="2057400"/>
+            <a:ext cx="5646960" cy="320040"/>
+          </a:xfrm>
+          <a:prstGeom prst="roundRect">
+            <a:avLst>
+              <a:gd name="adj" fmla="val 5000"/>
+            </a:avLst>
+          </a:prstGeom>
+          <a:solidFill>
+            <a:srgbClr val="FFFFFF"/>
+          </a:solidFill>
+          <a:ln w="9525">
+            <a:solidFill>
+              <a:srgbClr val="CADCFC"/>
+            </a:solidFill>
+          </a:ln>
+        </p:spPr>
+      </p:sp>
+      <p:sp>
+        <p:nvSpPr>
+          <p:cNvPr id="21" name="Field1Lbl"/>
+          <p:cNvSpPr/>
+          <p:nvPr/>
+        </p:nvSpPr>
+        <p:spPr bwMode="auto">
+          <a:xfrm>
+            <a:off x="5577840" y="1828800"/>
+            <a:ext cx="5646960" cy="228600"/>
+          </a:xfrm>
+          <a:prstGeom prst="rect">
+            <a:avLst/>
+          </a:prstGeom>
+          <a:noFill/>
+          <a:ln/>
+        </p:spPr>
+        <p:txBody>
+          <a:bodyPr wrap="square" rtlCol="0" anchor="b"/>
+          <a:lstStyle/>
+          <a:p>
+            <a:pPr marL="91440" indent="0">
+              <a:buNone/>
+              <a:defRPr/>
+            </a:pPr>
+            <a:r>
+              <a:rPr lang="en-US" sz="950" b="1">
+                <a:solidFill>
+                  <a:srgbClr val="CADCFC"/>
+                </a:solidFill>
+                <a:latin typeface="Calibri"/>
+              </a:rPr>
+              <a:t>Full Name</a:t>
+            </a:r>
+            <a:endParaRPr/>
+          </a:p>
+        </p:txBody>
+      </p:sp>
+      <p:sp>
+        <p:nvSpPr>
+          <p:cNvPr id="22" name="Field1Text"/>
+          <p:cNvSpPr/>
+          <p:nvPr/>
+        </p:nvSpPr>
+        <p:spPr bwMode="auto">
+          <a:xfrm>
+            <a:off x="5668560" y="2057400"/>
+            <a:ext cx="5464080" cy="320040"/>
+          </a:xfrm>
+          <a:prstGeom prst="rect">
+            <a:avLst/>
+          </a:prstGeom>
+          <a:noFill/>
+          <a:ln/>
+        </p:spPr>
+        <p:txBody>
+          <a:bodyPr wrap="square" rtlCol="0" anchor="ctr"/>
+          <a:lstStyle/>
+          <a:p>
+            <a:pPr marL="0" indent="0">
+              <a:buNone/>
+              <a:defRPr/>
+            </a:pPr>
+            <a:r>
+              <a:rPr lang="en-US" sz="1050">
+                <a:solidFill>
+                  <a:srgbClr val="9BA8C0"/>
+                </a:solidFill>
+                <a:latin typeface="Calibri"/>
+              </a:rPr>
+              <a:t>John Doe</a:t>
+            </a:r>
+            <a:endParaRPr/>
+          </a:p>
+        </p:txBody>
+      </p:sp>
+      <p:sp>
+        <p:nvSpPr>
+          <p:cNvPr id="23" name="Field2Box"/>
+          <p:cNvSpPr/>
+          <p:nvPr/>
+        </p:nvSpPr>
+        <p:spPr bwMode="auto">
+          <a:xfrm>
+            <a:off x="5577840" y="2560320"/>
+            <a:ext cx="5646960" cy="320040"/>
+          </a:xfrm>
+          <a:prstGeom prst="roundRect">
+            <a:avLst>
+              <a:gd name="adj" fmla="val 5000"/>
+            </a:avLst>
+          </a:prstGeom>
+          <a:solidFill>
+            <a:srgbClr val="FFFFFF"/>
+          </a:solidFill>
+          <a:ln w="9525">
+            <a:solidFill>
+              <a:srgbClr val="CADCFC"/>
+            </a:solidFill>
+          </a:ln>
+        </p:spPr>
+      </p:sp>
+      <p:sp>
+        <p:nvSpPr>
+          <p:cNvPr id="24" name="Field2Lbl"/>
+          <p:cNvSpPr/>
+          <p:nvPr/>
+        </p:nvSpPr>
+        <p:spPr bwMode="auto">
+          <a:xfrm>
+            <a:off x="5577840" y="2331720"/>
+            <a:ext cx="5646960" cy="228600"/>
+          </a:xfrm>
+          <a:prstGeom prst="rect">
+            <a:avLst/>
+          </a:prstGeom>
+          <a:noFill/>
+          <a:ln/>
+        </p:spPr>
+        <p:txBody>
+          <a:bodyPr wrap="square" rtlCol="0" anchor="b"/>
+          <a:lstStyle/>
+          <a:p>
+            <a:pPr marL="91440" indent="0">
+              <a:buNone/>
+              <a:defRPr/>
+            </a:pPr>
+            <a:r>
+              <a:rPr lang="en-US" sz="950" b="1">
+                <a:solidFill>
+                  <a:srgbClr val="CADCFC"/>
+                </a:solidFill>
+                <a:latin typeface="Calibri"/>
+              </a:rPr>
+              <a:t>Email Address</a:t>
+            </a:r>
+            <a:endParaRPr/>
+          </a:p>
+        </p:txBody>
+      </p:sp>
+      <p:sp>
+        <p:nvSpPr>
+          <p:cNvPr id="25" name="Field2Text"/>
+          <p:cNvSpPr/>
+          <p:nvPr/>
+        </p:nvSpPr>
+        <p:spPr bwMode="auto">
+          <a:xfrm>
+            <a:off x="5668560" y="2560320"/>
+            <a:ext cx="5464080" cy="320040"/>
+          </a:xfrm>
+          <a:prstGeom prst="rect">
+            <a:avLst/>
+          </a:prstGeom>
+          <a:noFill/>
+          <a:ln/>
+        </p:spPr>
+        <p:txBody>
+          <a:bodyPr wrap="square" rtlCol="0" anchor="ctr"/>
+          <a:lstStyle/>
+          <a:p>
+            <a:pPr marL="0" indent="0">
+              <a:buNone/>
+              <a:defRPr/>
+            </a:pPr>
+            <a:r>
+              <a:rPr lang="en-US" sz="1050">
+                <a:solidFill>
+                  <a:srgbClr val="9BA8C0"/>
+                </a:solidFill>
+                <a:latin typeface="Calibri"/>
+              </a:rPr>
+              <a:t>john@example.com</a:t>
+            </a:r>
+            <a:endParaRPr/>
+          </a:p>
+        </p:txBody>
+      </p:sp>
+      <p:sp>
+        <p:nvSpPr>
+          <p:cNvPr id="26" name="Field3Box"/>
+          <p:cNvSpPr/>
+          <p:nvPr/>
+        </p:nvSpPr>
+        <p:spPr bwMode="auto">
+          <a:xfrm>
+            <a:off x="5577840" y="3063240"/>
+            <a:ext cx="5646960" cy="320040"/>
+          </a:xfrm>
+          <a:prstGeom prst="roundRect">
+            <a:avLst>
+              <a:gd name="adj" fmla="val 5000"/>
+            </a:avLst>
+          </a:prstGeom>
+          <a:solidFill>
+            <a:srgbClr val="FFFFFF"/>
+          </a:solidFill>
+          <a:ln w="19050">
+            <a:solidFill>
+              <a:srgbClr val="E53E3E"/>
+            </a:solidFill>
+          </a:ln>
+        </p:spPr>
+      </p:sp>
+      <p:sp>
+        <p:nvSpPr>
+          <p:cNvPr id="27" name="Field3Lbl"/>
+          <p:cNvSpPr/>
+          <p:nvPr/>
+        </p:nvSpPr>
+        <p:spPr bwMode="auto">
+          <a:xfrm>
+            <a:off x="5577840" y="2834640"/>
+            <a:ext cx="5646960" cy="228600"/>
+          </a:xfrm>
+          <a:prstGeom prst="rect">
+            <a:avLst/>
+          </a:prstGeom>
+          <a:noFill/>
+          <a:ln/>
+        </p:spPr>
+        <p:txBody>
+          <a:bodyPr wrap="square" rtlCol="0" anchor="b"/>
+          <a:lstStyle/>
+          <a:p>
+            <a:pPr marL="91440" indent="0">
+              <a:buNone/>
+              <a:defRPr/>
+            </a:pPr>
+            <a:r>
+              <a:rPr lang="en-US" sz="950" b="1">
+                <a:solidFill>
+                  <a:srgbClr val="CADCFC"/>
+                </a:solidFill>
+                <a:latin typeface="Calibri"/>
+              </a:rPr>
+              <a:t>Password</a:t>
+            </a:r>
+            <a:endParaRPr/>
+          </a:p>
+        </p:txBody>
+      </p:sp>
+      <p:sp>
+        <p:nvSpPr>
+          <p:cNvPr id="28" name="Field3Text"/>
+          <p:cNvSpPr/>
+          <p:nvPr/>
+        </p:nvSpPr>
+        <p:spPr bwMode="auto">
+          <a:xfrm>
+            <a:off x="5668560" y="3063240"/>
+            <a:ext cx="5464080" cy="320040"/>
+          </a:xfrm>
+          <a:prstGeom prst="rect">
+            <a:avLst/>
+          </a:prstGeom>
+          <a:noFill/>
+          <a:ln/>
+        </p:spPr>
+        <p:txBody>
+          <a:bodyPr wrap="square" rtlCol="0" anchor="ctr"/>
+          <a:lstStyle/>
+          <a:p>
+            <a:pPr marL="0" indent="0">
+              <a:buNone/>
+              <a:defRPr/>
+            </a:pPr>
+            <a:r>
+              <a:rPr lang="en-US" sz="1400">
+                <a:solidFill>
+                  <a:srgbClr val="5B6B8C"/>
+                </a:solidFill>
+                <a:latin typeface="Calibri"/>
+              </a:rPr>
+              <a:t>●●●●●</a:t>
+            </a:r>
+            <a:endParaRPr/>
+          </a:p>
+        </p:txBody>
+      </p:sp>
+      <p:sp>
+        <p:nvSpPr>
+          <p:cNvPr id="29" name="ErrMsg"/>
+          <p:cNvSpPr/>
+          <p:nvPr/>
+        </p:nvSpPr>
+        <p:spPr bwMode="auto">
+          <a:xfrm>
+            <a:off x="5668560" y="3383280"/>
+            <a:ext cx="5464080" cy="228600"/>
+          </a:xfrm>
+          <a:prstGeom prst="rect">
+            <a:avLst/>
+          </a:prstGeom>
+          <a:noFill/>
+          <a:ln/>
+        </p:spPr>
+        <p:txBody>
+          <a:bodyPr wrap="square" rtlCol="0" anchor="t"/>
+          <a:lstStyle/>
+          <a:p>
+            <a:pPr marL="0" indent="0">
+              <a:buNone/>
+              <a:defRPr/>
+            </a:pPr>
+            <a:r>
+              <a:rPr lang="en-US" sz="950">
+                <a:solidFill>
+                  <a:srgbClr val="E53E3E"/>
+                </a:solidFill>
+                <a:latin typeface="Calibri"/>
+              </a:rPr>
+              <a:t>⚠ Password must be at least 8 characters with uppercase &amp; number.</a:t>
+            </a:r>
+            <a:endParaRPr/>
+          </a:p>
+        </p:txBody>
+      </p:sp>
+      <p:sp>
+        <p:nvSpPr>
+          <p:cNvPr id="30" name="Field4Box"/>
+          <p:cNvSpPr/>
+          <p:nvPr/>
+        </p:nvSpPr>
+        <p:spPr bwMode="auto">
+          <a:xfrm>
+            <a:off x="5577840" y="3749040"/>
+            <a:ext cx="5646960" cy="320040"/>
+          </a:xfrm>
+          <a:prstGeom prst="roundRect">
+            <a:avLst>
+              <a:gd name="adj" fmla="val 5000"/>
+            </a:avLst>
+          </a:prstGeom>
+          <a:solidFill>
+            <a:srgbClr val="FFFFFF"/>
+          </a:solidFill>
+          <a:ln w="9525">
+            <a:solidFill>
+              <a:srgbClr val="CADCFC"/>
+            </a:solidFill>
+          </a:ln>
+        </p:spPr>
+      </p:sp>
+      <p:sp>
+        <p:nvSpPr>
+          <p:cNvPr id="31" name="Field4Lbl"/>
+          <p:cNvSpPr/>
+          <p:nvPr/>
+        </p:nvSpPr>
+        <p:spPr bwMode="auto">
+          <a:xfrm>
+            <a:off x="5577840" y="3520440"/>
+            <a:ext cx="5646960" cy="228600"/>
+          </a:xfrm>
+          <a:prstGeom prst="rect">
+            <a:avLst/>
+          </a:prstGeom>
+          <a:noFill/>
+          <a:ln/>
+        </p:spPr>
+        <p:txBody>
+          <a:bodyPr wrap="square" rtlCol="0" anchor="b"/>
+          <a:lstStyle/>
+          <a:p>
+            <a:pPr marL="91440" indent="0">
+              <a:buNone/>
+              <a:defRPr/>
+            </a:pPr>
+            <a:r>
+              <a:rPr lang="en-US" sz="950" b="1">
+                <a:solidFill>
+                  <a:srgbClr val="CADCFC"/>
+                </a:solidFill>
+                <a:latin typeface="Calibri"/>
+              </a:rPr>
+              <a:t>Confirm Password</a:t>
+            </a:r>
+            <a:endParaRPr/>
+          </a:p>
+        </p:txBody>
+      </p:sp>
+      <p:sp>
+        <p:nvSpPr>
+          <p:cNvPr id="32" name="Field4Text"/>
+          <p:cNvSpPr/>
+          <p:nvPr/>
+        </p:nvSpPr>
+        <p:spPr bwMode="auto">
+          <a:xfrm>
+            <a:off x="5668560" y="3749040"/>
+            <a:ext cx="5464080" cy="320040"/>
+          </a:xfrm>
+          <a:prstGeom prst="rect">
+            <a:avLst/>
+          </a:prstGeom>
+          <a:noFill/>
+          <a:ln/>
+        </p:spPr>
+        <p:txBody>
+          <a:bodyPr wrap="square" rtlCol="0" anchor="ctr"/>
+          <a:lstStyle/>
+          <a:p>
+            <a:pPr marL="0" indent="0">
+              <a:buNone/>
+              <a:defRPr/>
+            </a:pPr>
+            <a:r>
+              <a:rPr lang="en-US" sz="1400">
+                <a:solidFill>
+                  <a:srgbClr val="5B6B8C"/>
+                </a:solidFill>
+                <a:latin typeface="Calibri"/>
+              </a:rPr>
+              <a:t>●●●●●●●●</a:t>
+            </a:r>
+            <a:endParaRPr/>
+          </a:p>
+        </p:txBody>
+      </p:sp>
+      <p:sp>
+        <p:nvSpPr>
+          <p:cNvPr id="33" name="SubmitBtn"/>
+          <p:cNvSpPr/>
+          <p:nvPr/>
+        </p:nvSpPr>
+        <p:spPr bwMode="auto">
+          <a:xfrm>
+            <a:off x="5577840" y="4251960"/>
+            <a:ext cx="5646960" cy="411480"/>
+          </a:xfrm>
+          <a:prstGeom prst="roundRect">
+            <a:avLst>
+              <a:gd name="adj" fmla="val 5000"/>
+            </a:avLst>
+          </a:prstGeom>
+          <a:solidFill>
+            <a:srgbClr val="CADCFC"/>
+          </a:solidFill>
+          <a:ln/>
+        </p:spPr>
+      </p:sp>
+      <p:sp>
+        <p:nvSpPr>
+          <p:cNvPr id="34" name="SubmitTxt"/>
+          <p:cNvSpPr/>
+          <p:nvPr/>
+        </p:nvSpPr>
+        <p:spPr bwMode="auto">
+          <a:xfrm>
+            <a:off x="5577840" y="4251960"/>
+            <a:ext cx="5646960" cy="411480"/>
+          </a:xfrm>
+          <a:prstGeom prst="rect">
+            <a:avLst/>
+          </a:prstGeom>
+          <a:noFill/>
+          <a:ln/>
+        </p:spPr>
+        <p:txBody>
+          <a:bodyPr wrap="square" rtlCol="0" anchor="ctr"/>
+          <a:lstStyle/>
+          <a:p>
+            <a:pPr algn="ctr">
+              <a:buNone/>
+              <a:defRPr/>
+            </a:pPr>
+            <a:r>
+              <a:rPr lang="en-US" sz="1300" b="1">
+                <a:solidFill>
+                  <a:srgbClr val="1E2761"/>
+                </a:solidFill>
+                <a:latin typeface="Calibri"/>
+              </a:rPr>
+              <a:t>Register / Sign In</a:t>
+            </a:r>
+            <a:endParaRPr/>
+          </a:p>
+        </p:txBody>
+      </p:sp>
+    </p:spTree>
+  </p:cSld>
+  <p:clrMapOvr>
+    <a:masterClrMapping/>
+  </p:clrMapOvr>
+  <mc:AlternateContent xmlns:mc="http://schemas.openxmlformats.org/markup-compatibility/2006">
+    <mc:Choice xmlns:p14="http://schemas.microsoft.com/office/powerpoint/2010/main" Requires="p14">
+      <p:transition p14:dur="2000" advClick="1"/>
+    </mc:Choice>
+    <mc:Fallback>
+      <p:transition advClick="1"/>
+    </mc:Fallback>
+  </mc:AlternateContent>
+</p:sld>
+</file>
+
+<file path=ppt/slides/slide14.xml><?xml version="1.0" encoding="utf-8"?>
+<p:sld xmlns:a="http://schemas.openxmlformats.org/drawingml/2006/main" xmlns:r="http://schemas.openxmlformats.org/officeDocument/2006/relationships" xmlns:p="http://schemas.openxmlformats.org/presentationml/2006/main" xmlns:m="http://schemas.openxmlformats.org/officeDocument/2006/math" xmlns:w="http://schemas.openxmlformats.org/wordprocessingml/2006/main" showMasterPhAnim="0" show="1">
+  <p:cSld name="Slide 1">
+    <p:bg>
+      <p:bgPr shadeToTitle="0">
+        <a:solidFill>
+          <a:srgbClr val="1E2761"/>
+        </a:solidFill>
+      </p:bgPr>
+    </p:bg>
+    <p:spTree>
+      <p:nvGrpSpPr>
+        <p:cNvPr id="1" name=""/>
+        <p:cNvGrpSpPr/>
+        <p:nvPr/>
+      </p:nvGrpSpPr>
+      <p:grpSpPr bwMode="auto">
+        <a:xfrm>
+          <a:off x="0" y="0"/>
+          <a:ext cx="0" cy="0"/>
+          <a:chOff x="0" y="0"/>
+          <a:chExt cx="0" cy="0"/>
+        </a:xfrm>
+      </p:grpSpPr>
+      <p:sp>
+        <p:nvSpPr>
+          <p:cNvPr id="2" name="Text 0"/>
+          <p:cNvSpPr/>
+          <p:nvPr/>
+        </p:nvSpPr>
+        <p:spPr bwMode="auto">
+          <a:xfrm>
+            <a:off x="457200" y="228600"/>
+            <a:ext cx="11247120" cy="594360"/>
+          </a:xfrm>
+          <a:prstGeom prst="rect">
+            <a:avLst/>
+          </a:prstGeom>
+          <a:noFill/>
+          <a:ln/>
+        </p:spPr>
+        <p:txBody>
+          <a:bodyPr wrap="square" rtlCol="0" anchor="ctr"/>
+          <a:lstStyle/>
+          <a:p>
+            <a:pPr marL="0" indent="0">
+              <a:buNone/>
+              <a:defRPr/>
+            </a:pPr>
+            <a:r>
+              <a:rPr lang="en-US" sz="3200" b="1">
+                <a:solidFill>
+                  <a:srgbClr val="FFFFFF"/>
+                </a:solidFill>
+                <a:latin typeface="Cambria"/>
+                <a:ea typeface="Cambria"/>
+                <a:cs typeface="Cambria"/>
+              </a:rPr>
+              <a:t>Backend Integration</a:t>
+            </a:r>
+            <a:endParaRPr lang="en-US" sz="3200"/>
+          </a:p>
+        </p:txBody>
+      </p:sp>
+      <p:sp>
+        <p:nvSpPr>
+          <p:cNvPr id="3" name="Text 1"/>
+          <p:cNvSpPr/>
+          <p:nvPr/>
+        </p:nvSpPr>
+        <p:spPr bwMode="auto">
+          <a:xfrm>
+            <a:off x="457200" y="868680"/>
+            <a:ext cx="11247120" cy="411480"/>
+          </a:xfrm>
+          <a:prstGeom prst="rect">
+            <a:avLst/>
+          </a:prstGeom>
+          <a:noFill/>
+          <a:ln/>
+        </p:spPr>
+        <p:txBody>
+          <a:bodyPr wrap="square" rtlCol="0" anchor="ctr"/>
+          <a:lstStyle/>
+          <a:p>
+            <a:pPr marL="0" indent="0">
+              <a:buNone/>
+              <a:defRPr/>
+            </a:pPr>
+            <a:r>
+              <a:rPr lang="en-US" sz="1300">
+                <a:solidFill>
+                  <a:srgbClr val="CADCFC"/>
+                </a:solidFill>
+                <a:latin typeface="Calibri"/>
+                <a:ea typeface="Calibri"/>
+                <a:cs typeface="Calibri"/>
+              </a:rPr>
+              <a:t>The frontend communicates with authentication endpoints and processes the responses from the backend.</a:t>
+            </a:r>
+            <a:endParaRPr lang="en-US" sz="1300"/>
+          </a:p>
+        </p:txBody>
+      </p:sp>
+      <p:sp>
+        <p:nvSpPr>
+          <p:cNvPr id="4" name="Shape 2"/>
+          <p:cNvSpPr/>
+          <p:nvPr/>
+        </p:nvSpPr>
+        <p:spPr bwMode="auto">
+          <a:xfrm>
+            <a:off x="457200" y="1463040"/>
+            <a:ext cx="2286000" cy="1143000"/>
+          </a:xfrm>
+          <a:prstGeom prst="roundRect">
+            <a:avLst>
+              <a:gd name="adj" fmla="val 8000"/>
+            </a:avLst>
+          </a:prstGeom>
+          <a:solidFill>
+            <a:srgbClr val="2D3A7A"/>
+          </a:solidFill>
+          <a:ln w="19050">
+            <a:solidFill>
+              <a:srgbClr val="CADCFC"/>
+            </a:solidFill>
+            <a:prstDash val="solid"/>
+          </a:ln>
+        </p:spPr>
+      </p:sp>
+      <p:sp>
+        <p:nvSpPr>
+          <p:cNvPr id="5" name="Text 3"/>
+          <p:cNvSpPr/>
+          <p:nvPr/>
+        </p:nvSpPr>
+        <p:spPr bwMode="auto">
+          <a:xfrm>
+            <a:off x="457200" y="1463040"/>
+            <a:ext cx="2286000" cy="1143000"/>
+          </a:xfrm>
+          <a:prstGeom prst="rect">
+            <a:avLst/>
+          </a:prstGeom>
+          <a:noFill/>
+          <a:ln/>
+        </p:spPr>
+        <p:txBody>
+          <a:bodyPr wrap="square" rtlCol="0" anchor="ctr"/>
+          <a:lstStyle/>
+          <a:p>
+            <a:pPr marL="0" indent="0" algn="ctr">
+              <a:buNone/>
+              <a:defRPr/>
+            </a:pPr>
+            <a:r>
+              <a:rPr lang="en-US" sz="1600" b="1">
+                <a:solidFill>
+                  <a:srgbClr val="FFFFFF"/>
+                </a:solidFill>
+                <a:latin typeface="Calibri"/>
+                <a:ea typeface="Calibri"/>
+                <a:cs typeface="Calibri"/>
+              </a:rPr>
+              <a:t>Frontend</a:t>
+            </a:r>
+            <a:endParaRPr lang="en-US" sz="1600"/>
+          </a:p>
+          <a:p>
+            <a:pPr marL="0" indent="0" algn="ctr">
+              <a:buNone/>
+              <a:defRPr/>
+            </a:pPr>
+            <a:r>
+              <a:rPr lang="en-US" sz="1000">
+                <a:solidFill>
+                  <a:srgbClr val="CADCFC"/>
+                </a:solidFill>
+                <a:latin typeface="Calibri"/>
+                <a:ea typeface="Calibri"/>
+                <a:cs typeface="Calibri"/>
+              </a:rPr>
+              <a:t>React.js</a:t>
+            </a:r>
+            <a:endParaRPr lang="en-US" sz="1600"/>
+          </a:p>
+        </p:txBody>
+      </p:sp>
+      <p:sp>
+        <p:nvSpPr>
+          <p:cNvPr id="6" name="Shape 4"/>
+          <p:cNvSpPr/>
+          <p:nvPr/>
+        </p:nvSpPr>
+        <p:spPr bwMode="auto">
+          <a:xfrm>
+            <a:off x="2834640" y="1943100"/>
+            <a:ext cx="1463040" cy="0"/>
+          </a:xfrm>
+          <a:prstGeom prst="line">
+            <a:avLst/>
+          </a:prstGeom>
+          <a:noFill/>
+          <a:ln w="31750">
+            <a:solidFill>
+              <a:srgbClr val="CADCFC"/>
+            </a:solidFill>
+            <a:prstDash val="solid"/>
+            <a:tailEnd type="arrow"/>
+          </a:ln>
+        </p:spPr>
+      </p:sp>
+      <p:sp>
+        <p:nvSpPr>
+          <p:cNvPr id="7" name="Text 5"/>
+          <p:cNvSpPr/>
+          <p:nvPr/>
+        </p:nvSpPr>
+        <p:spPr bwMode="auto">
+          <a:xfrm>
+            <a:off x="2743200" y="1600200"/>
+            <a:ext cx="1645920" cy="256032"/>
+          </a:xfrm>
+          <a:prstGeom prst="rect">
+            <a:avLst/>
+          </a:prstGeom>
+          <a:noFill/>
+          <a:ln/>
+        </p:spPr>
+        <p:txBody>
+          <a:bodyPr wrap="square" rtlCol="0" anchor="ctr"/>
+          <a:lstStyle/>
+          <a:p>
+            <a:pPr marL="0" indent="0" algn="ctr">
+              <a:buNone/>
+              <a:defRPr/>
+            </a:pPr>
+            <a:r>
+              <a:rPr lang="en-US" sz="1000" b="1">
+                <a:solidFill>
+                  <a:srgbClr val="CADCFC"/>
+                </a:solidFill>
+                <a:latin typeface="Calibri"/>
+                <a:ea typeface="Calibri"/>
+                <a:cs typeface="Calibri"/>
+              </a:rPr>
+              <a:t>HTTP Request</a:t>
+            </a:r>
+            <a:endParaRPr lang="en-US" sz="1000"/>
+          </a:p>
+        </p:txBody>
+      </p:sp>
+      <p:sp>
+        <p:nvSpPr>
+          <p:cNvPr id="8" name="Shape 6"/>
+          <p:cNvSpPr/>
+          <p:nvPr/>
+        </p:nvSpPr>
+        <p:spPr bwMode="auto">
+          <a:xfrm>
+            <a:off x="4389120" y="1463040"/>
+            <a:ext cx="2286000" cy="1143000"/>
+          </a:xfrm>
+          <a:prstGeom prst="roundRect">
+            <a:avLst>
+              <a:gd name="adj" fmla="val 8000"/>
+            </a:avLst>
+          </a:prstGeom>
+          <a:solidFill>
+            <a:srgbClr val="2D3A7A"/>
+          </a:solidFill>
+          <a:ln w="19050">
+            <a:solidFill>
+              <a:srgbClr val="CADCFC"/>
+            </a:solidFill>
+            <a:prstDash val="solid"/>
+          </a:ln>
+        </p:spPr>
+      </p:sp>
+      <p:sp>
+        <p:nvSpPr>
+          <p:cNvPr id="9" name="Text 7"/>
+          <p:cNvSpPr/>
+          <p:nvPr/>
+        </p:nvSpPr>
+        <p:spPr bwMode="auto">
+          <a:xfrm>
+            <a:off x="4389120" y="1463040"/>
+            <a:ext cx="2286000" cy="1143000"/>
+          </a:xfrm>
+          <a:prstGeom prst="rect">
+            <a:avLst/>
+          </a:prstGeom>
+          <a:noFill/>
+          <a:ln/>
+        </p:spPr>
+        <p:txBody>
+          <a:bodyPr wrap="square" rtlCol="0" anchor="ctr"/>
+          <a:lstStyle/>
+          <a:p>
+            <a:pPr marL="0" indent="0" algn="ctr">
+              <a:buNone/>
+              <a:defRPr/>
+            </a:pPr>
+            <a:r>
+              <a:rPr lang="en-US" sz="1600" b="1">
+                <a:solidFill>
+                  <a:srgbClr val="FFFFFF"/>
+                </a:solidFill>
+                <a:latin typeface="Calibri"/>
+                <a:ea typeface="Calibri"/>
+                <a:cs typeface="Calibri"/>
+              </a:rPr>
+              <a:t>API</a:t>
+            </a:r>
+            <a:endParaRPr lang="en-US" sz="1600"/>
+          </a:p>
+          <a:p>
+            <a:pPr marL="0" indent="0" algn="ctr">
+              <a:buNone/>
+              <a:defRPr/>
+            </a:pPr>
+            <a:r>
+              <a:rPr lang="en-US" sz="1000">
+                <a:solidFill>
+                  <a:srgbClr val="CADCFC"/>
+                </a:solidFill>
+                <a:latin typeface="Calibri"/>
+                <a:ea typeface="Calibri"/>
+                <a:cs typeface="Calibri"/>
+              </a:rPr>
+              <a:t>ASP.NET Core</a:t>
+            </a:r>
+            <a:endParaRPr lang="en-US" sz="1600"/>
+          </a:p>
+        </p:txBody>
+      </p:sp>
+      <p:sp>
+        <p:nvSpPr>
+          <p:cNvPr id="10" name="Shape 8"/>
+          <p:cNvSpPr/>
+          <p:nvPr/>
+        </p:nvSpPr>
+        <p:spPr bwMode="auto">
+          <a:xfrm>
+            <a:off x="6766560" y="1943100"/>
+            <a:ext cx="1463040" cy="0"/>
+          </a:xfrm>
+          <a:prstGeom prst="line">
+            <a:avLst/>
+          </a:prstGeom>
+          <a:noFill/>
+          <a:ln w="31750">
+            <a:solidFill>
+              <a:srgbClr val="CADCFC"/>
+            </a:solidFill>
+            <a:prstDash val="solid"/>
+            <a:tailEnd type="arrow"/>
+          </a:ln>
+        </p:spPr>
+      </p:sp>
+      <p:sp>
+        <p:nvSpPr>
+          <p:cNvPr id="11" name="Text 9"/>
+          <p:cNvSpPr/>
+          <p:nvPr/>
+        </p:nvSpPr>
+        <p:spPr bwMode="auto">
+          <a:xfrm>
+            <a:off x="6675120" y="1600200"/>
+            <a:ext cx="1645920" cy="256032"/>
+          </a:xfrm>
+          <a:prstGeom prst="rect">
+            <a:avLst/>
+          </a:prstGeom>
+          <a:noFill/>
+          <a:ln/>
+        </p:spPr>
+        <p:txBody>
+          <a:bodyPr wrap="square" rtlCol="0" anchor="ctr"/>
+          <a:lstStyle/>
+          <a:p>
+            <a:pPr marL="0" indent="0" algn="ctr">
+              <a:buNone/>
+              <a:defRPr/>
+            </a:pPr>
+            <a:r>
+              <a:rPr lang="en-US" sz="1000" b="1">
+                <a:solidFill>
+                  <a:srgbClr val="CADCFC"/>
+                </a:solidFill>
+                <a:latin typeface="Calibri"/>
+                <a:ea typeface="Calibri"/>
+                <a:cs typeface="Calibri"/>
+              </a:rPr>
+              <a:t>EF Core Query</a:t>
+            </a:r>
+            <a:endParaRPr lang="en-US" sz="1000"/>
+          </a:p>
+        </p:txBody>
+      </p:sp>
+      <p:sp>
+        <p:nvSpPr>
+          <p:cNvPr id="12" name="Shape 10"/>
+          <p:cNvSpPr/>
+          <p:nvPr/>
+        </p:nvSpPr>
+        <p:spPr bwMode="auto">
+          <a:xfrm>
+            <a:off x="8321039" y="1463040"/>
+            <a:ext cx="2286000" cy="1143000"/>
+          </a:xfrm>
+          <a:prstGeom prst="roundRect">
+            <a:avLst>
+              <a:gd name="adj" fmla="val 8000"/>
+            </a:avLst>
+          </a:prstGeom>
+          <a:solidFill>
+            <a:srgbClr val="2D3A7A"/>
+          </a:solidFill>
+          <a:ln w="19050">
+            <a:solidFill>
+              <a:srgbClr val="CADCFC"/>
+            </a:solidFill>
+            <a:prstDash val="solid"/>
+          </a:ln>
+        </p:spPr>
+      </p:sp>
+      <p:sp>
+        <p:nvSpPr>
+          <p:cNvPr id="13" name="Text 11"/>
+          <p:cNvSpPr/>
+          <p:nvPr/>
+        </p:nvSpPr>
+        <p:spPr bwMode="auto">
+          <a:xfrm>
+            <a:off x="8321039" y="1463040"/>
+            <a:ext cx="2286000" cy="1143000"/>
+          </a:xfrm>
+          <a:prstGeom prst="rect">
+            <a:avLst/>
+          </a:prstGeom>
+          <a:noFill/>
+          <a:ln/>
+        </p:spPr>
+        <p:txBody>
+          <a:bodyPr wrap="square" rtlCol="0" anchor="ctr"/>
+          <a:lstStyle/>
+          <a:p>
+            <a:pPr marL="0" indent="0" algn="ctr">
+              <a:buNone/>
+              <a:defRPr/>
+            </a:pPr>
+            <a:r>
+              <a:rPr lang="en-US" sz="1600" b="1">
+                <a:solidFill>
+                  <a:srgbClr val="FFFFFF"/>
+                </a:solidFill>
+                <a:latin typeface="Calibri"/>
+                <a:ea typeface="Calibri"/>
+                <a:cs typeface="Calibri"/>
+              </a:rPr>
+              <a:t>Database</a:t>
+            </a:r>
+            <a:endParaRPr lang="en-US" sz="1600"/>
+          </a:p>
+          <a:p>
+            <a:pPr marL="0" indent="0" algn="ctr">
+              <a:buNone/>
+              <a:defRPr/>
+            </a:pPr>
+            <a:r>
+              <a:rPr lang="en-US" sz="1000">
+                <a:solidFill>
+                  <a:srgbClr val="CADCFC"/>
+                </a:solidFill>
+                <a:latin typeface="Calibri"/>
+                <a:ea typeface="Calibri"/>
+                <a:cs typeface="Calibri"/>
+              </a:rPr>
+              <a:t>SQL Server</a:t>
+            </a:r>
+            <a:endParaRPr lang="en-US" sz="1600"/>
+          </a:p>
+        </p:txBody>
+      </p:sp>
+      <p:sp>
+        <p:nvSpPr>
+          <p:cNvPr id="14" name="Text 12"/>
+          <p:cNvSpPr/>
+          <p:nvPr/>
+        </p:nvSpPr>
+        <p:spPr bwMode="auto">
+          <a:xfrm>
+            <a:off x="2743200" y="2423160"/>
+            <a:ext cx="1645920" cy="256032"/>
+          </a:xfrm>
+          <a:prstGeom prst="rect">
+            <a:avLst/>
+          </a:prstGeom>
+          <a:noFill/>
+          <a:ln/>
+        </p:spPr>
+        <p:txBody>
+          <a:bodyPr wrap="square" rtlCol="0" anchor="ctr"/>
+          <a:lstStyle/>
+          <a:p>
+            <a:pPr marL="0" indent="0" algn="ctr">
+              <a:buNone/>
+              <a:defRPr/>
+            </a:pPr>
+            <a:r>
+              <a:rPr lang="en-US" sz="1100" b="1">
+                <a:solidFill>
+                  <a:srgbClr val="A5B4FC"/>
+                </a:solidFill>
+                <a:latin typeface="Calibri"/>
+                <a:ea typeface="Calibri"/>
+                <a:cs typeface="Calibri"/>
+              </a:rPr>
+              <a:t>← Token</a:t>
+            </a:r>
+            <a:endParaRPr lang="en-US" sz="1100"/>
+          </a:p>
+        </p:txBody>
+      </p:sp>
+      <p:sp>
+        <p:nvSpPr>
+          <p:cNvPr id="15" name="Shape 13"/>
+          <p:cNvSpPr/>
+          <p:nvPr/>
+        </p:nvSpPr>
+        <p:spPr bwMode="auto">
+          <a:xfrm>
+            <a:off x="457200" y="2834640"/>
+            <a:ext cx="5029200" cy="3566160"/>
+          </a:xfrm>
+          <a:prstGeom prst="roundRect">
+            <a:avLst>
+              <a:gd name="adj" fmla="val 2051"/>
+            </a:avLst>
+          </a:prstGeom>
+          <a:solidFill>
+            <a:srgbClr val="232E6B"/>
+          </a:solidFill>
+          <a:ln w="12700">
+            <a:solidFill>
+              <a:srgbClr val="3D4F9F"/>
+            </a:solidFill>
+            <a:prstDash val="solid"/>
+          </a:ln>
+        </p:spPr>
+      </p:sp>
+      <p:sp>
+        <p:nvSpPr>
+          <p:cNvPr id="16" name="Text 14"/>
+          <p:cNvSpPr/>
+          <p:nvPr/>
+        </p:nvSpPr>
+        <p:spPr bwMode="auto">
+          <a:xfrm>
+            <a:off x="594360" y="2926080"/>
+            <a:ext cx="4754880" cy="3383280"/>
+          </a:xfrm>
+          <a:prstGeom prst="rect">
+            <a:avLst/>
+          </a:prstGeom>
+          <a:noFill/>
+          <a:ln/>
+        </p:spPr>
+        <p:txBody>
+          <a:bodyPr wrap="square" rtlCol="0" anchor="t"/>
+          <a:lstStyle/>
+          <a:p>
+            <a:pPr marL="0" indent="0">
+              <a:spcAft>
+                <a:spcPts val="400"/>
+              </a:spcAft>
+              <a:buNone/>
+              <a:defRPr/>
+            </a:pPr>
+            <a:r>
+              <a:rPr lang="en-US" sz="1400" b="1">
+                <a:solidFill>
+                  <a:srgbClr val="FFFFFF"/>
+                </a:solidFill>
+                <a:latin typeface="Calibri"/>
+                <a:ea typeface="Calibri"/>
+                <a:cs typeface="Calibri"/>
+              </a:rPr>
+              <a:t>How It Works</a:t>
+            </a:r>
+            <a:endParaRPr lang="en-US" sz="1400"/>
+          </a:p>
+          <a:p>
+            <a:pPr marL="0" indent="0">
+              <a:spcAft>
+                <a:spcPts val="400"/>
+              </a:spcAft>
+              <a:buNone/>
+              <a:defRPr/>
+            </a:pPr>
+            <a:r>
+              <a:rPr lang="en-US" sz="800">
+                <a:solidFill>
+                  <a:srgbClr val="000000"/>
+                </a:solidFill>
+                <a:latin typeface="Calibri"/>
+                <a:ea typeface="Calibri"/>
+                <a:cs typeface="Calibri"/>
+              </a:rPr>
+              <a:t> </a:t>
+            </a:r>
+            <a:endParaRPr lang="en-US" sz="1400"/>
+          </a:p>
+          <a:p>
+            <a:pPr marL="0" indent="0">
+              <a:spcAft>
+                <a:spcPts val="400"/>
+              </a:spcAft>
+              <a:buNone/>
+              <a:defRPr/>
+            </a:pPr>
+            <a:r>
+              <a:rPr lang="en-US" sz="1100">
+                <a:solidFill>
+                  <a:srgbClr val="CADCFC"/>
+                </a:solidFill>
+                <a:latin typeface="Calibri"/>
+                <a:ea typeface="Calibri"/>
+                <a:cs typeface="Calibri"/>
+              </a:rPr>
+              <a:t>1. User submits credentials via the React frontend.</a:t>
+            </a:r>
+            <a:endParaRPr lang="en-US" sz="1400"/>
+          </a:p>
+          <a:p>
+            <a:pPr marL="0" indent="0">
+              <a:spcAft>
+                <a:spcPts val="400"/>
+              </a:spcAft>
+              <a:buNone/>
+              <a:defRPr/>
+            </a:pPr>
+            <a:r>
+              <a:rPr lang="en-US" sz="1100">
+                <a:solidFill>
+                  <a:srgbClr val="CADCFC"/>
+                </a:solidFill>
+                <a:latin typeface="Calibri"/>
+                <a:ea typeface="Calibri"/>
+                <a:cs typeface="Calibri"/>
+              </a:rPr>
+              <a:t>2. ASP.NET Core API validates against SQL Server via EF Core.</a:t>
+            </a:r>
+            <a:endParaRPr lang="en-US" sz="1400"/>
+          </a:p>
+          <a:p>
+            <a:pPr marL="0" indent="0">
+              <a:spcAft>
+                <a:spcPts val="400"/>
+              </a:spcAft>
+              <a:buNone/>
+              <a:defRPr/>
+            </a:pPr>
+            <a:r>
+              <a:rPr lang="en-US" sz="1100">
+                <a:solidFill>
+                  <a:srgbClr val="CADCFC"/>
+                </a:solidFill>
+                <a:latin typeface="Calibri"/>
+                <a:ea typeface="Calibri"/>
+                <a:cs typeface="Calibri"/>
+              </a:rPr>
+              <a:t>3. On success, a JWT access token is issued and returned.</a:t>
+            </a:r>
+            <a:endParaRPr lang="en-US" sz="1400"/>
+          </a:p>
+          <a:p>
+            <a:pPr marL="0" indent="0">
+              <a:spcAft>
+                <a:spcPts val="400"/>
+              </a:spcAft>
+              <a:buNone/>
+              <a:defRPr/>
+            </a:pPr>
+            <a:r>
+              <a:rPr lang="en-US" sz="1100">
+                <a:solidFill>
+                  <a:srgbClr val="CADCFC"/>
+                </a:solidFill>
+                <a:latin typeface="Calibri"/>
+                <a:ea typeface="Calibri"/>
+                <a:cs typeface="Calibri"/>
+              </a:rPr>
+              <a:t>4. Frontend stores token and attaches it to all subsequent requests.</a:t>
+            </a:r>
+            <a:endParaRPr lang="en-US" sz="1400"/>
+          </a:p>
+          <a:p>
+            <a:pPr marL="0" indent="0">
+              <a:spcAft>
+                <a:spcPts val="400"/>
+              </a:spcAft>
+              <a:buNone/>
+              <a:defRPr/>
+            </a:pPr>
+            <a:r>
+              <a:rPr lang="en-US" sz="1100">
+                <a:solidFill>
+                  <a:srgbClr val="CADCFC"/>
+                </a:solidFill>
+                <a:latin typeface="Calibri"/>
+                <a:ea typeface="Calibri"/>
+                <a:cs typeface="Calibri"/>
+              </a:rPr>
+              <a:t>5. API middleware validates the token before processing any protected request.</a:t>
+            </a:r>
+            <a:endParaRPr lang="en-US" sz="1400"/>
+          </a:p>
+        </p:txBody>
+      </p:sp>
+      <p:sp>
+        <p:nvSpPr>
+          <p:cNvPr id="17" name="Shape 15"/>
+          <p:cNvSpPr/>
+          <p:nvPr/>
+        </p:nvSpPr>
+        <p:spPr bwMode="auto">
+          <a:xfrm>
+            <a:off x="5760720" y="2834640"/>
+            <a:ext cx="5943600" cy="594360"/>
+          </a:xfrm>
+          <a:prstGeom prst="roundRect">
+            <a:avLst>
+              <a:gd name="adj" fmla="val 23077"/>
+            </a:avLst>
+          </a:prstGeom>
+          <a:solidFill>
+            <a:srgbClr val="0F1744"/>
+          </a:solidFill>
+          <a:ln w="12700">
+            <a:solidFill>
+              <a:srgbClr val="4F6BBA"/>
+            </a:solidFill>
+            <a:prstDash val="solid"/>
+          </a:ln>
+        </p:spPr>
+      </p:sp>
+      <p:sp>
+        <p:nvSpPr>
+          <p:cNvPr id="18" name="Text 16"/>
+          <p:cNvSpPr/>
+          <p:nvPr/>
+        </p:nvSpPr>
+        <p:spPr bwMode="auto">
+          <a:xfrm>
+            <a:off x="5760720" y="2834640"/>
+            <a:ext cx="5943600" cy="594360"/>
+          </a:xfrm>
+          <a:prstGeom prst="rect">
+            <a:avLst/>
+          </a:prstGeom>
+          <a:noFill/>
+          <a:ln/>
+        </p:spPr>
+        <p:txBody>
+          <a:bodyPr wrap="square" rtlCol="0" anchor="ctr"/>
+          <a:lstStyle/>
+          <a:p>
+            <a:pPr marL="0" indent="0" algn="ctr">
+              <a:buNone/>
+              <a:defRPr/>
+            </a:pPr>
+            <a:r>
+              <a:rPr lang="en-US" sz="1300" b="1">
+                <a:solidFill>
+                  <a:srgbClr val="60A5FA"/>
+                </a:solidFill>
+                <a:latin typeface="Courier New"/>
+                <a:ea typeface="Courier New"/>
+                <a:cs typeface="Courier New"/>
+              </a:rPr>
+              <a:t>Authorization: Bearer &lt;token&gt;</a:t>
+            </a:r>
+            <a:endParaRPr lang="en-US" sz="1300"/>
+          </a:p>
+        </p:txBody>
+      </p:sp>
+      <p:sp>
+        <p:nvSpPr>
+          <p:cNvPr id="19" name="Text 17"/>
+          <p:cNvSpPr/>
+          <p:nvPr/>
+        </p:nvSpPr>
+        <p:spPr bwMode="auto">
+          <a:xfrm>
+            <a:off x="5760720" y="3520440"/>
+            <a:ext cx="5943600" cy="594360"/>
+          </a:xfrm>
+          <a:prstGeom prst="rect">
+            <a:avLst/>
+          </a:prstGeom>
+          <a:noFill/>
+          <a:ln/>
+        </p:spPr>
+        <p:txBody>
+          <a:bodyPr wrap="square" rtlCol="0" anchor="ctr"/>
+          <a:lstStyle/>
+          <a:p>
+            <a:pPr marL="0" indent="0" algn="ctr">
+              <a:buNone/>
+              <a:defRPr/>
+            </a:pPr>
+            <a:r>
+              <a:rPr lang="en-US" sz="1200">
+                <a:solidFill>
+                  <a:srgbClr val="CADCFC"/>
+                </a:solidFill>
+                <a:latin typeface="Calibri"/>
+                <a:ea typeface="Calibri"/>
+                <a:cs typeface="Calibri"/>
+              </a:rPr>
+              <a:t>The token identifies authenticated users and is attached to all protected API requests.</a:t>
+            </a:r>
+            <a:endParaRPr lang="en-US" sz="1200"/>
+          </a:p>
+        </p:txBody>
+      </p:sp>
+      <p:sp>
+        <p:nvSpPr>
+          <p:cNvPr id="20" name="Shape 18"/>
+          <p:cNvSpPr/>
+          <p:nvPr/>
+        </p:nvSpPr>
+        <p:spPr bwMode="auto">
+          <a:xfrm>
+            <a:off x="5760720" y="4251960"/>
+            <a:ext cx="5943600" cy="594360"/>
+          </a:xfrm>
+          <a:prstGeom prst="roundRect">
+            <a:avLst>
+              <a:gd name="adj" fmla="val 12308"/>
+            </a:avLst>
+          </a:prstGeom>
+          <a:solidFill>
+            <a:srgbClr val="232E6B"/>
+          </a:solidFill>
+          <a:ln w="12700">
+            <a:solidFill>
+              <a:srgbClr val="3D4F9F"/>
+            </a:solidFill>
+            <a:prstDash val="solid"/>
+          </a:ln>
+        </p:spPr>
+      </p:sp>
+      <p:sp>
+        <p:nvSpPr>
+          <p:cNvPr id="21" name="Text 19"/>
+          <p:cNvSpPr/>
+          <p:nvPr/>
+        </p:nvSpPr>
+        <p:spPr bwMode="auto">
+          <a:xfrm>
+            <a:off x="5897880" y="4251960"/>
+            <a:ext cx="5669280" cy="594360"/>
+          </a:xfrm>
+          <a:prstGeom prst="rect">
+            <a:avLst/>
+          </a:prstGeom>
+          <a:noFill/>
+          <a:ln/>
+        </p:spPr>
+        <p:txBody>
+          <a:bodyPr wrap="square" rtlCol="0" anchor="ctr"/>
+          <a:lstStyle/>
+          <a:p>
+            <a:pPr marL="0" indent="0">
+              <a:buNone/>
+              <a:defRPr/>
+            </a:pPr>
+            <a:r>
+              <a:rPr lang="en-US" sz="1100" b="1">
+                <a:solidFill>
+                  <a:srgbClr val="FFFFFF"/>
+                </a:solidFill>
+                <a:latin typeface="Calibri"/>
+                <a:ea typeface="Calibri"/>
+                <a:cs typeface="Calibri"/>
+              </a:rPr>
+              <a:t>JWT Token  </a:t>
+            </a:r>
+            <a:r>
+              <a:rPr lang="en-US" sz="1000">
+                <a:solidFill>
+                  <a:srgbClr val="CADCFC"/>
+                </a:solidFill>
+                <a:latin typeface="Calibri"/>
+                <a:ea typeface="Calibri"/>
+                <a:cs typeface="Calibri"/>
+              </a:rPr>
+              <a:t>Signed with server secret key. Contains user claims and expiration time.</a:t>
+            </a:r>
+            <a:endParaRPr lang="en-US" sz="1100"/>
+          </a:p>
+        </p:txBody>
+      </p:sp>
+      <p:sp>
+        <p:nvSpPr>
+          <p:cNvPr id="22" name="Shape 20"/>
+          <p:cNvSpPr/>
+          <p:nvPr/>
+        </p:nvSpPr>
+        <p:spPr bwMode="auto">
+          <a:xfrm>
+            <a:off x="5760720" y="4983480"/>
+            <a:ext cx="5943600" cy="594360"/>
+          </a:xfrm>
+          <a:prstGeom prst="roundRect">
+            <a:avLst>
+              <a:gd name="adj" fmla="val 12308"/>
+            </a:avLst>
+          </a:prstGeom>
+          <a:solidFill>
+            <a:srgbClr val="232E6B"/>
+          </a:solidFill>
+          <a:ln w="12700">
+            <a:solidFill>
+              <a:srgbClr val="3D4F9F"/>
+            </a:solidFill>
+            <a:prstDash val="solid"/>
+          </a:ln>
+        </p:spPr>
+      </p:sp>
+      <p:sp>
+        <p:nvSpPr>
+          <p:cNvPr id="23" name="Text 21"/>
+          <p:cNvSpPr/>
+          <p:nvPr/>
+        </p:nvSpPr>
+        <p:spPr bwMode="auto">
+          <a:xfrm>
+            <a:off x="5897880" y="4983480"/>
+            <a:ext cx="5669280" cy="594360"/>
+          </a:xfrm>
+          <a:prstGeom prst="rect">
+            <a:avLst/>
+          </a:prstGeom>
+          <a:noFill/>
+          <a:ln/>
+        </p:spPr>
+        <p:txBody>
+          <a:bodyPr wrap="square" rtlCol="0" anchor="ctr"/>
+          <a:lstStyle/>
+          <a:p>
+            <a:pPr marL="0" indent="0">
+              <a:buNone/>
+              <a:defRPr/>
+            </a:pPr>
+            <a:r>
+              <a:rPr lang="en-US" sz="1100" b="1">
+                <a:solidFill>
+                  <a:srgbClr val="FFFFFF"/>
+                </a:solidFill>
+                <a:latin typeface="Calibri"/>
+                <a:ea typeface="Calibri"/>
+                <a:cs typeface="Calibri"/>
+              </a:rPr>
+              <a:t>CORS Policy  </a:t>
+            </a:r>
+            <a:r>
+              <a:rPr lang="en-US" sz="1000">
+                <a:solidFill>
+                  <a:srgbClr val="CADCFC"/>
+                </a:solidFill>
+                <a:latin typeface="Calibri"/>
+                <a:ea typeface="Calibri"/>
+                <a:cs typeface="Calibri"/>
+              </a:rPr>
+              <a:t>API is configured to accept requests only from the trusted frontend origin.</a:t>
+            </a:r>
+            <a:endParaRPr lang="en-US" sz="1100"/>
+          </a:p>
+        </p:txBody>
+      </p:sp>
+      <p:sp>
+        <p:nvSpPr>
+          <p:cNvPr id="24" name="Shape 22"/>
+          <p:cNvSpPr/>
+          <p:nvPr/>
+        </p:nvSpPr>
+        <p:spPr bwMode="auto">
+          <a:xfrm>
+            <a:off x="5760720" y="5715000"/>
+            <a:ext cx="5943600" cy="594360"/>
+          </a:xfrm>
+          <a:prstGeom prst="roundRect">
+            <a:avLst>
+              <a:gd name="adj" fmla="val 12308"/>
+            </a:avLst>
+          </a:prstGeom>
+          <a:solidFill>
+            <a:srgbClr val="232E6B"/>
+          </a:solidFill>
+          <a:ln w="12700">
+            <a:solidFill>
+              <a:srgbClr val="3D4F9F"/>
+            </a:solidFill>
+            <a:prstDash val="solid"/>
+          </a:ln>
+        </p:spPr>
+      </p:sp>
+      <p:sp>
+        <p:nvSpPr>
+          <p:cNvPr id="25" name="Text 23"/>
+          <p:cNvSpPr/>
+          <p:nvPr/>
+        </p:nvSpPr>
+        <p:spPr bwMode="auto">
+          <a:xfrm>
+            <a:off x="5897880" y="5715000"/>
+            <a:ext cx="5669280" cy="594360"/>
+          </a:xfrm>
+          <a:prstGeom prst="rect">
+            <a:avLst/>
+          </a:prstGeom>
+          <a:noFill/>
+          <a:ln/>
+        </p:spPr>
+        <p:txBody>
+          <a:bodyPr wrap="square" rtlCol="0" anchor="ctr"/>
+          <a:lstStyle/>
+          <a:p>
+            <a:pPr marL="0" indent="0">
+              <a:buNone/>
+              <a:defRPr/>
+            </a:pPr>
+            <a:r>
+              <a:rPr lang="en-US" sz="1100" b="1">
+                <a:solidFill>
+                  <a:srgbClr val="FFFFFF"/>
+                </a:solidFill>
+                <a:latin typeface="Calibri"/>
+                <a:ea typeface="Calibri"/>
+                <a:cs typeface="Calibri"/>
+              </a:rPr>
+              <a:t>HTTPS Only  </a:t>
+            </a:r>
+            <a:r>
+              <a:rPr lang="en-US" sz="1000">
+                <a:solidFill>
+                  <a:srgbClr val="CADCFC"/>
+                </a:solidFill>
+                <a:latin typeface="Calibri"/>
+                <a:ea typeface="Calibri"/>
+                <a:cs typeface="Calibri"/>
+              </a:rPr>
+              <a:t>All traffic encrypted in transit. Tokens never exposed over plain HTTP.</a:t>
+            </a:r>
+            <a:endParaRPr lang="en-US" sz="1100"/>
+          </a:p>
+        </p:txBody>
+      </p:sp>
+    </p:spTree>
+  </p:cSld>
+  <p:clrMapOvr>
+    <a:masterClrMapping/>
+  </p:clrMapOvr>
+  <mc:AlternateContent xmlns:mc="http://schemas.openxmlformats.org/markup-compatibility/2006">
+    <mc:Choice xmlns:p14="http://schemas.microsoft.com/office/powerpoint/2010/main" Requires="p14">
+      <p:transition p14:dur="2000" advClick="1"/>
+    </mc:Choice>
+    <mc:Fallback>
+      <p:transition advClick="1"/>
+    </mc:Fallback>
+  </mc:AlternateContent>
+</p:sld>
+</file>
+
+<file path=ppt/slides/slide15.xml><?xml version="1.0" encoding="utf-8"?>
 <p:sld xmlns:a="http://schemas.openxmlformats.org/drawingml/2006/main" xmlns:r="http://schemas.openxmlformats.org/officeDocument/2006/relationships" xmlns:p="http://schemas.openxmlformats.org/presentationml/2006/main" xmlns:m="http://schemas.openxmlformats.org/officeDocument/2006/math" xmlns:w="http://schemas.openxmlformats.org/wordprocessingml/2006/main" showMasterPhAnim="0" show="1">
   <p:cSld name="Slide 12">
     <p:bg>
@@ -4122,7 +7154,7 @@
 </p:sld>
 </file>
 
-<file path=ppt/slides/slide13.xml><?xml version="1.0" encoding="utf-8"?>
+<file path=ppt/slides/slide16.xml><?xml version="1.0" encoding="utf-8"?>
 <p:sld xmlns:a="http://schemas.openxmlformats.org/drawingml/2006/main" xmlns:r="http://schemas.openxmlformats.org/officeDocument/2006/relationships" xmlns:p="http://schemas.openxmlformats.org/presentationml/2006/main" xmlns:m="http://schemas.openxmlformats.org/officeDocument/2006/math" xmlns:w="http://schemas.openxmlformats.org/wordprocessingml/2006/main" showMasterPhAnim="0" show="1">
   <p:cSld name="Slide 13">
     <p:bg>
@@ -5214,7 +8246,7 @@
 </p:sld>
 </file>
 
-<file path=ppt/slides/slide14.xml><?xml version="1.0" encoding="utf-8"?>
+<file path=ppt/slides/slide17.xml><?xml version="1.0" encoding="utf-8"?>
 <p:sld xmlns:a="http://schemas.openxmlformats.org/drawingml/2006/main" xmlns:r="http://schemas.openxmlformats.org/officeDocument/2006/relationships" xmlns:p="http://schemas.openxmlformats.org/presentationml/2006/main" xmlns:m="http://schemas.openxmlformats.org/officeDocument/2006/math" xmlns:w="http://schemas.openxmlformats.org/wordprocessingml/2006/main" showMasterPhAnim="0" show="1">
   <p:cSld name="Slide 14">
     <p:bg>
@@ -8727,6 +11759,770 @@
 
 <file path=ppt/slides/slide5.xml><?xml version="1.0" encoding="utf-8"?>
 <p:sld xmlns:a="http://schemas.openxmlformats.org/drawingml/2006/main" xmlns:r="http://schemas.openxmlformats.org/officeDocument/2006/relationships" xmlns:p="http://schemas.openxmlformats.org/presentationml/2006/main" xmlns:m="http://schemas.openxmlformats.org/officeDocument/2006/math" xmlns:w="http://schemas.openxmlformats.org/wordprocessingml/2006/main" showMasterPhAnim="0" show="1">
+  <p:cSld name="Slide 15">
+    <p:bg>
+      <p:bgPr shadeToTitle="0">
+        <a:solidFill>
+          <a:srgbClr val="FFFFFF"/>
+        </a:solidFill>
+      </p:bgPr>
+    </p:bg>
+    <p:spTree>
+      <p:nvGrpSpPr>
+        <p:cNvPr id="1" name=""/>
+        <p:cNvGrpSpPr/>
+        <p:nvPr/>
+      </p:nvGrpSpPr>
+      <p:grpSpPr bwMode="auto">
+        <a:xfrm>
+          <a:off x="0" y="0"/>
+          <a:ext cx="0" cy="0"/>
+          <a:chOff x="0" y="0"/>
+          <a:chExt cx="0" cy="0"/>
+        </a:xfrm>
+      </p:grpSpPr>
+      <p:sp>
+        <p:nvSpPr>
+          <p:cNvPr id="2" name="Text 0"/>
+          <p:cNvSpPr/>
+          <p:nvPr/>
+        </p:nvSpPr>
+        <p:spPr bwMode="auto">
+          <a:xfrm>
+            <a:off x="548640" y="365760"/>
+            <a:ext cx="10058400" cy="640080"/>
+          </a:xfrm>
+          <a:prstGeom prst="rect">
+            <a:avLst/>
+          </a:prstGeom>
+          <a:noFill/>
+          <a:ln/>
+        </p:spPr>
+        <p:txBody>
+          <a:bodyPr wrap="square" rtlCol="0" anchor="ctr"/>
+          <a:lstStyle/>
+          <a:p>
+            <a:pPr marL="0" indent="0">
+              <a:buNone/>
+              <a:defRPr/>
+            </a:pPr>
+            <a:r>
+              <a:rPr lang="en-US" sz="3200" b="1">
+                <a:solidFill>
+                  <a:srgbClr val="1E2761"/>
+                </a:solidFill>
+                <a:latin typeface="Cambria"/>
+              </a:rPr>
+              <a:t>Third-Party Services &amp; Integrations</a:t>
+            </a:r>
+            <a:endParaRPr/>
+          </a:p>
+        </p:txBody>
+      </p:sp>
+      <p:sp>
+        <p:nvSpPr>
+          <p:cNvPr id="3" name="Text 1"/>
+          <p:cNvSpPr/>
+          <p:nvPr/>
+        </p:nvSpPr>
+        <p:spPr bwMode="auto">
+          <a:xfrm>
+            <a:off x="548640" y="960120"/>
+            <a:ext cx="10058400" cy="457200"/>
+          </a:xfrm>
+          <a:prstGeom prst="rect">
+            <a:avLst/>
+          </a:prstGeom>
+          <a:noFill/>
+          <a:ln/>
+        </p:spPr>
+        <p:txBody>
+          <a:bodyPr wrap="square" rtlCol="0" anchor="ctr"/>
+          <a:lstStyle/>
+          <a:p>
+            <a:pPr marL="0" indent="0">
+              <a:buNone/>
+              <a:defRPr/>
+            </a:pPr>
+            <a:r>
+              <a:rPr lang="en-US" sz="1300">
+                <a:solidFill>
+                  <a:srgbClr val="5B6B8C"/>
+                </a:solidFill>
+                <a:latin typeface="Calibri"/>
+              </a:rPr>
+              <a:t>THMS leverages three key external services to power background jobs, data persistence, and transactional email delivery.</a:t>
+            </a:r>
+            <a:endParaRPr/>
+          </a:p>
+        </p:txBody>
+      </p:sp>
+      <p:sp>
+        <p:nvSpPr>
+          <p:cNvPr id="4" name="Card 1"/>
+          <p:cNvSpPr/>
+          <p:nvPr/>
+        </p:nvSpPr>
+        <p:spPr bwMode="auto">
+          <a:xfrm>
+            <a:off x="548640" y="1600200"/>
+            <a:ext cx="3520080" cy="4800600"/>
+          </a:xfrm>
+          <a:prstGeom prst="roundRect">
+            <a:avLst>
+              <a:gd name="adj" fmla="val 2712"/>
+            </a:avLst>
+          </a:prstGeom>
+          <a:solidFill>
+            <a:srgbClr val="F4F7FE"/>
+          </a:solidFill>
+          <a:ln/>
+        </p:spPr>
+      </p:sp>
+      <p:sp>
+        <p:nvSpPr>
+          <p:cNvPr id="5" name="Circle 1"/>
+          <p:cNvSpPr/>
+          <p:nvPr/>
+        </p:nvSpPr>
+        <p:spPr bwMode="auto">
+          <a:xfrm>
+            <a:off x="1898880" y="1920240"/>
+            <a:ext cx="822960" cy="822960"/>
+          </a:xfrm>
+          <a:prstGeom prst="ellipse">
+            <a:avLst/>
+          </a:prstGeom>
+          <a:solidFill>
+            <a:srgbClr val="CADCFC"/>
+          </a:solidFill>
+          <a:ln/>
+        </p:spPr>
+      </p:sp>
+      <p:sp>
+        <p:nvSpPr>
+          <p:cNvPr id="6" name="Label 1"/>
+          <p:cNvSpPr/>
+          <p:nvPr/>
+        </p:nvSpPr>
+        <p:spPr bwMode="auto">
+          <a:xfrm>
+            <a:off x="1898880" y="1920240"/>
+            <a:ext cx="822960" cy="822960"/>
+          </a:xfrm>
+          <a:prstGeom prst="ellipse">
+            <a:avLst/>
+          </a:prstGeom>
+          <a:noFill/>
+          <a:ln/>
+        </p:spPr>
+        <p:txBody>
+          <a:bodyPr wrap="square" rtlCol="0" anchor="ctr"/>
+          <a:lstStyle/>
+          <a:p>
+            <a:pPr algn="ctr">
+              <a:buNone/>
+              <a:defRPr/>
+            </a:pPr>
+            <a:r>
+              <a:rPr lang="en-US" sz="1800" b="1">
+                <a:solidFill>
+                  <a:srgbClr val="1E2761"/>
+                </a:solidFill>
+                <a:latin typeface="Cambria"/>
+              </a:rPr>
+              <a:t>HF</a:t>
+            </a:r>
+            <a:endParaRPr/>
+          </a:p>
+        </p:txBody>
+      </p:sp>
+      <p:sp>
+        <p:nvSpPr>
+          <p:cNvPr id="7" name="Title 1"/>
+          <p:cNvSpPr/>
+          <p:nvPr/>
+        </p:nvSpPr>
+        <p:spPr bwMode="auto">
+          <a:xfrm>
+            <a:off x="731520" y="2880360"/>
+            <a:ext cx="3154320" cy="480240"/>
+          </a:xfrm>
+          <a:prstGeom prst="rect">
+            <a:avLst/>
+          </a:prstGeom>
+          <a:noFill/>
+          <a:ln/>
+        </p:spPr>
+        <p:txBody>
+          <a:bodyPr wrap="square" rtlCol="0" anchor="ctr"/>
+          <a:lstStyle/>
+          <a:p>
+            <a:pPr marL="0" indent="0" algn="ctr">
+              <a:buNone/>
+              <a:defRPr/>
+            </a:pPr>
+            <a:r>
+              <a:rPr lang="en-US" sz="2000" b="1">
+                <a:solidFill>
+                  <a:srgbClr val="1E2761"/>
+                </a:solidFill>
+                <a:latin typeface="Cambria"/>
+              </a:rPr>
+              <a:t>Hangfire</a:t>
+            </a:r>
+            <a:endParaRPr/>
+          </a:p>
+        </p:txBody>
+      </p:sp>
+      <p:sp>
+        <p:nvSpPr>
+          <p:cNvPr id="8" name="Tag 1"/>
+          <p:cNvSpPr/>
+          <p:nvPr/>
+        </p:nvSpPr>
+        <p:spPr bwMode="auto">
+          <a:xfrm>
+            <a:off x="1463040" y="3383280"/>
+            <a:ext cx="1188720" cy="274320"/>
+          </a:xfrm>
+          <a:prstGeom prst="roundRect">
+            <a:avLst>
+              <a:gd name="adj" fmla="val 16667"/>
+            </a:avLst>
+          </a:prstGeom>
+          <a:solidFill>
+            <a:srgbClr val="1E2761"/>
+          </a:solidFill>
+          <a:ln/>
+        </p:spPr>
+      </p:sp>
+      <p:sp>
+        <p:nvSpPr>
+          <p:cNvPr id="9" name="TagTxt 1"/>
+          <p:cNvSpPr/>
+          <p:nvPr/>
+        </p:nvSpPr>
+        <p:spPr bwMode="auto">
+          <a:xfrm>
+            <a:off x="1463040" y="3383280"/>
+            <a:ext cx="1188720" cy="274320"/>
+          </a:xfrm>
+          <a:prstGeom prst="rect">
+            <a:avLst/>
+          </a:prstGeom>
+          <a:noFill/>
+          <a:ln/>
+        </p:spPr>
+        <p:txBody>
+          <a:bodyPr wrap="square" rtlCol="0" anchor="ctr"/>
+          <a:lstStyle/>
+          <a:p>
+            <a:pPr algn="ctr">
+              <a:buNone/>
+              <a:defRPr/>
+            </a:pPr>
+            <a:r>
+              <a:rPr lang="en-US" sz="900" b="1">
+                <a:solidFill>
+                  <a:srgbClr val="FFFFFF"/>
+                </a:solidFill>
+                <a:latin typeface="Calibri"/>
+              </a:rPr>
+              <a:t>Background Jobs</a:t>
+            </a:r>
+            <a:endParaRPr/>
+          </a:p>
+        </p:txBody>
+      </p:sp>
+      <p:sp>
+        <p:nvSpPr>
+          <p:cNvPr id="10" name="Body 1"/>
+          <p:cNvSpPr/>
+          <p:nvPr/>
+        </p:nvSpPr>
+        <p:spPr bwMode="auto">
+          <a:xfrm>
+            <a:off x="731520" y="3749040"/>
+            <a:ext cx="3154320" cy="2194560"/>
+          </a:xfrm>
+          <a:prstGeom prst="rect">
+            <a:avLst/>
+          </a:prstGeom>
+          <a:noFill/>
+          <a:ln/>
+        </p:spPr>
+        <p:txBody>
+          <a:bodyPr wrap="square" rtlCol="0" anchor="t"/>
+          <a:lstStyle/>
+          <a:p>
+            <a:pPr marL="0" indent="0" algn="l">
+              <a:buNone/>
+              <a:defRPr/>
+            </a:pPr>
+            <a:r>
+              <a:rPr lang="en-US" sz="1100">
+                <a:solidFill>
+                  <a:srgbClr val="5B6B8C"/>
+                </a:solidFill>
+                <a:latin typeface="Calibri"/>
+              </a:rPr>
+              <a:t>Used in THMS to schedule and process recurring tasks reliably without blocking HTTP request threads. Powers appointment reminders, automated report generation, and deferred notification dispatch — all with a built-in dashboard for monitoring job status.</a:t>
+            </a:r>
+            <a:endParaRPr/>
+          </a:p>
+        </p:txBody>
+      </p:sp>
+      <p:sp>
+        <p:nvSpPr>
+          <p:cNvPr id="11" name="Card 2"/>
+          <p:cNvSpPr/>
+          <p:nvPr/>
+        </p:nvSpPr>
+        <p:spPr bwMode="auto">
+          <a:xfrm>
+            <a:off x="4457280" y="1600200"/>
+            <a:ext cx="3520080" cy="4800600"/>
+          </a:xfrm>
+          <a:prstGeom prst="roundRect">
+            <a:avLst>
+              <a:gd name="adj" fmla="val 2712"/>
+            </a:avLst>
+          </a:prstGeom>
+          <a:solidFill>
+            <a:srgbClr val="F4F7FE"/>
+          </a:solidFill>
+          <a:ln/>
+        </p:spPr>
+      </p:sp>
+      <p:sp>
+        <p:nvSpPr>
+          <p:cNvPr id="12" name="Circle 2"/>
+          <p:cNvSpPr/>
+          <p:nvPr/>
+        </p:nvSpPr>
+        <p:spPr bwMode="auto">
+          <a:xfrm>
+            <a:off x="5807520" y="1920240"/>
+            <a:ext cx="822960" cy="822960"/>
+          </a:xfrm>
+          <a:prstGeom prst="ellipse">
+            <a:avLst/>
+          </a:prstGeom>
+          <a:solidFill>
+            <a:srgbClr val="CADCFC"/>
+          </a:solidFill>
+          <a:ln/>
+        </p:spPr>
+      </p:sp>
+      <p:sp>
+        <p:nvSpPr>
+          <p:cNvPr id="13" name="Label 2"/>
+          <p:cNvSpPr/>
+          <p:nvPr/>
+        </p:nvSpPr>
+        <p:spPr bwMode="auto">
+          <a:xfrm>
+            <a:off x="5807520" y="1920240"/>
+            <a:ext cx="822960" cy="822960"/>
+          </a:xfrm>
+          <a:prstGeom prst="ellipse">
+            <a:avLst/>
+          </a:prstGeom>
+          <a:noFill/>
+          <a:ln/>
+        </p:spPr>
+        <p:txBody>
+          <a:bodyPr wrap="square" rtlCol="0" anchor="ctr"/>
+          <a:lstStyle/>
+          <a:p>
+            <a:pPr algn="ctr">
+              <a:buNone/>
+              <a:defRPr/>
+            </a:pPr>
+            <a:r>
+              <a:rPr lang="en-US" sz="1800" b="1">
+                <a:solidFill>
+                  <a:srgbClr val="1E2761"/>
+                </a:solidFill>
+                <a:latin typeface="Cambria"/>
+              </a:rPr>
+              <a:t>SB</a:t>
+            </a:r>
+            <a:endParaRPr/>
+          </a:p>
+        </p:txBody>
+      </p:sp>
+      <p:sp>
+        <p:nvSpPr>
+          <p:cNvPr id="14" name="Title 2"/>
+          <p:cNvSpPr/>
+          <p:nvPr/>
+        </p:nvSpPr>
+        <p:spPr bwMode="auto">
+          <a:xfrm>
+            <a:off x="4640160" y="2880360"/>
+            <a:ext cx="3154320" cy="480240"/>
+          </a:xfrm>
+          <a:prstGeom prst="rect">
+            <a:avLst/>
+          </a:prstGeom>
+          <a:noFill/>
+          <a:ln/>
+        </p:spPr>
+        <p:txBody>
+          <a:bodyPr wrap="square" rtlCol="0" anchor="ctr"/>
+          <a:lstStyle/>
+          <a:p>
+            <a:pPr marL="0" indent="0" algn="ctr">
+              <a:buNone/>
+              <a:defRPr/>
+            </a:pPr>
+            <a:r>
+              <a:rPr lang="en-US" sz="2000" b="1">
+                <a:solidFill>
+                  <a:srgbClr val="1E2761"/>
+                </a:solidFill>
+                <a:latin typeface="Cambria"/>
+              </a:rPr>
+              <a:t>Supabase</a:t>
+            </a:r>
+            <a:endParaRPr/>
+          </a:p>
+        </p:txBody>
+      </p:sp>
+      <p:sp>
+        <p:nvSpPr>
+          <p:cNvPr id="15" name="Tag 2"/>
+          <p:cNvSpPr/>
+          <p:nvPr/>
+        </p:nvSpPr>
+        <p:spPr bwMode="auto">
+          <a:xfrm>
+            <a:off x="5371680" y="3383280"/>
+            <a:ext cx="1188720" cy="274320"/>
+          </a:xfrm>
+          <a:prstGeom prst="roundRect">
+            <a:avLst>
+              <a:gd name="adj" fmla="val 16667"/>
+            </a:avLst>
+          </a:prstGeom>
+          <a:solidFill>
+            <a:srgbClr val="1E2761"/>
+          </a:solidFill>
+          <a:ln/>
+        </p:spPr>
+      </p:sp>
+      <p:sp>
+        <p:nvSpPr>
+          <p:cNvPr id="16" name="TagTxt 2"/>
+          <p:cNvSpPr/>
+          <p:nvPr/>
+        </p:nvSpPr>
+        <p:spPr bwMode="auto">
+          <a:xfrm>
+            <a:off x="5371680" y="3383280"/>
+            <a:ext cx="1188720" cy="274320"/>
+          </a:xfrm>
+          <a:prstGeom prst="rect">
+            <a:avLst/>
+          </a:prstGeom>
+          <a:noFill/>
+          <a:ln/>
+        </p:spPr>
+        <p:txBody>
+          <a:bodyPr wrap="square" rtlCol="0" anchor="ctr"/>
+          <a:lstStyle/>
+          <a:p>
+            <a:pPr algn="ctr">
+              <a:buNone/>
+              <a:defRPr/>
+            </a:pPr>
+            <a:r>
+              <a:rPr lang="en-US" sz="900" b="1">
+                <a:solidFill>
+                  <a:srgbClr val="FFFFFF"/>
+                </a:solidFill>
+                <a:latin typeface="Calibri"/>
+              </a:rPr>
+              <a:t>File Storage</a:t>
+            </a:r>
+            <a:endParaRPr/>
+          </a:p>
+        </p:txBody>
+      </p:sp>
+      <p:sp>
+        <p:nvSpPr>
+          <p:cNvPr id="17" name="Body 2"/>
+          <p:cNvSpPr/>
+          <p:nvPr/>
+        </p:nvSpPr>
+        <p:spPr bwMode="auto">
+          <a:xfrm>
+            <a:off x="4640160" y="3749040"/>
+            <a:ext cx="3154320" cy="2194560"/>
+          </a:xfrm>
+          <a:prstGeom prst="rect">
+            <a:avLst/>
+          </a:prstGeom>
+          <a:noFill/>
+          <a:ln/>
+        </p:spPr>
+        <p:txBody>
+          <a:bodyPr wrap="square" rtlCol="0" anchor="t"/>
+          <a:lstStyle/>
+          <a:p>
+            <a:pPr marL="0" indent="0" algn="l">
+              <a:buNone/>
+              <a:defRPr/>
+            </a:pPr>
+            <a:r>
+              <a:rPr lang="en-US" sz="1100">
+                <a:solidFill>
+                  <a:srgbClr val="5B6B8C"/>
+                </a:solidFill>
+                <a:latin typeface="Calibri"/>
+              </a:rPr>
+              <a:t>THMS uses Supabase Storage as the cloud file bucket for all binary uploads — patient MRI scans, medical records, and profile images. Files are stored securely with access-controlled URLs, keeping binary data out of SQL Server and the ASP.NET Core application layer.</a:t>
+            </a:r>
+            <a:endParaRPr/>
+          </a:p>
+        </p:txBody>
+      </p:sp>
+      <p:sp>
+        <p:nvSpPr>
+          <p:cNvPr id="18" name="Card 3"/>
+          <p:cNvSpPr/>
+          <p:nvPr/>
+        </p:nvSpPr>
+        <p:spPr bwMode="auto">
+          <a:xfrm>
+            <a:off x="8365920" y="1600200"/>
+            <a:ext cx="3245520" cy="4800600"/>
+          </a:xfrm>
+          <a:prstGeom prst="roundRect">
+            <a:avLst>
+              <a:gd name="adj" fmla="val 2712"/>
+            </a:avLst>
+          </a:prstGeom>
+          <a:solidFill>
+            <a:srgbClr val="F4F7FE"/>
+          </a:solidFill>
+          <a:ln/>
+        </p:spPr>
+      </p:sp>
+      <p:sp>
+        <p:nvSpPr>
+          <p:cNvPr id="19" name="Circle 3"/>
+          <p:cNvSpPr/>
+          <p:nvPr/>
+        </p:nvSpPr>
+        <p:spPr bwMode="auto">
+          <a:xfrm>
+            <a:off x="9671040" y="1920240"/>
+            <a:ext cx="822960" cy="822960"/>
+          </a:xfrm>
+          <a:prstGeom prst="ellipse">
+            <a:avLst/>
+          </a:prstGeom>
+          <a:solidFill>
+            <a:srgbClr val="CADCFC"/>
+          </a:solidFill>
+          <a:ln/>
+        </p:spPr>
+      </p:sp>
+      <p:sp>
+        <p:nvSpPr>
+          <p:cNvPr id="20" name="Label 3"/>
+          <p:cNvSpPr/>
+          <p:nvPr/>
+        </p:nvSpPr>
+        <p:spPr bwMode="auto">
+          <a:xfrm>
+            <a:off x="9671040" y="1920240"/>
+            <a:ext cx="822960" cy="822960"/>
+          </a:xfrm>
+          <a:prstGeom prst="ellipse">
+            <a:avLst/>
+          </a:prstGeom>
+          <a:noFill/>
+          <a:ln/>
+        </p:spPr>
+        <p:txBody>
+          <a:bodyPr wrap="square" rtlCol="0" anchor="ctr"/>
+          <a:lstStyle/>
+          <a:p>
+            <a:pPr algn="ctr">
+              <a:buNone/>
+              <a:defRPr/>
+            </a:pPr>
+            <a:r>
+              <a:rPr lang="en-US" sz="1800" b="1">
+                <a:solidFill>
+                  <a:srgbClr val="1E2761"/>
+                </a:solidFill>
+                <a:latin typeface="Cambria"/>
+              </a:rPr>
+              <a:t>SG</a:t>
+            </a:r>
+            <a:endParaRPr/>
+          </a:p>
+        </p:txBody>
+      </p:sp>
+      <p:sp>
+        <p:nvSpPr>
+          <p:cNvPr id="21" name="Title 3"/>
+          <p:cNvSpPr/>
+          <p:nvPr/>
+        </p:nvSpPr>
+        <p:spPr bwMode="auto">
+          <a:xfrm>
+            <a:off x="8548800" y="2880360"/>
+            <a:ext cx="2880000" cy="480240"/>
+          </a:xfrm>
+          <a:prstGeom prst="rect">
+            <a:avLst/>
+          </a:prstGeom>
+          <a:noFill/>
+          <a:ln/>
+        </p:spPr>
+        <p:txBody>
+          <a:bodyPr wrap="square" rtlCol="0" anchor="ctr"/>
+          <a:lstStyle/>
+          <a:p>
+            <a:pPr marL="0" indent="0" algn="ctr">
+              <a:buNone/>
+              <a:defRPr/>
+            </a:pPr>
+            <a:r>
+              <a:rPr lang="en-US" sz="2000" b="1">
+                <a:solidFill>
+                  <a:srgbClr val="1E2761"/>
+                </a:solidFill>
+                <a:latin typeface="Cambria"/>
+              </a:rPr>
+              <a:t>SendGrid</a:t>
+            </a:r>
+            <a:endParaRPr/>
+          </a:p>
+        </p:txBody>
+      </p:sp>
+      <p:sp>
+        <p:nvSpPr>
+          <p:cNvPr id="22" name="Tag 3"/>
+          <p:cNvSpPr/>
+          <p:nvPr/>
+        </p:nvSpPr>
+        <p:spPr bwMode="auto">
+          <a:xfrm>
+            <a:off x="9289440" y="3383280"/>
+            <a:ext cx="1188720" cy="274320"/>
+          </a:xfrm>
+          <a:prstGeom prst="roundRect">
+            <a:avLst>
+              <a:gd name="adj" fmla="val 16667"/>
+            </a:avLst>
+          </a:prstGeom>
+          <a:solidFill>
+            <a:srgbClr val="1E2761"/>
+          </a:solidFill>
+          <a:ln/>
+        </p:spPr>
+      </p:sp>
+      <p:sp>
+        <p:nvSpPr>
+          <p:cNvPr id="23" name="TagTxt 3"/>
+          <p:cNvSpPr/>
+          <p:nvPr/>
+        </p:nvSpPr>
+        <p:spPr bwMode="auto">
+          <a:xfrm>
+            <a:off x="9289440" y="3383280"/>
+            <a:ext cx="1188720" cy="274320"/>
+          </a:xfrm>
+          <a:prstGeom prst="rect">
+            <a:avLst/>
+          </a:prstGeom>
+          <a:noFill/>
+          <a:ln/>
+        </p:spPr>
+        <p:txBody>
+          <a:bodyPr wrap="square" rtlCol="0" anchor="ctr"/>
+          <a:lstStyle/>
+          <a:p>
+            <a:pPr algn="ctr">
+              <a:buNone/>
+              <a:defRPr/>
+            </a:pPr>
+            <a:r>
+              <a:rPr lang="en-US" sz="900" b="1">
+                <a:solidFill>
+                  <a:srgbClr val="FFFFFF"/>
+                </a:solidFill>
+                <a:latin typeface="Calibri"/>
+              </a:rPr>
+              <a:t>Email Delivery</a:t>
+            </a:r>
+            <a:endParaRPr/>
+          </a:p>
+        </p:txBody>
+      </p:sp>
+      <p:sp>
+        <p:nvSpPr>
+          <p:cNvPr id="24" name="Body 3"/>
+          <p:cNvSpPr/>
+          <p:nvPr/>
+        </p:nvSpPr>
+        <p:spPr bwMode="auto">
+          <a:xfrm>
+            <a:off x="8548800" y="3749040"/>
+            <a:ext cx="2880000" cy="2194560"/>
+          </a:xfrm>
+          <a:prstGeom prst="rect">
+            <a:avLst/>
+          </a:prstGeom>
+          <a:noFill/>
+          <a:ln/>
+        </p:spPr>
+        <p:txBody>
+          <a:bodyPr wrap="square" rtlCol="0" anchor="t"/>
+          <a:lstStyle/>
+          <a:p>
+            <a:pPr marL="0" indent="0" algn="l">
+              <a:buNone/>
+              <a:defRPr/>
+            </a:pPr>
+            <a:r>
+              <a:rPr lang="en-US" sz="1100">
+                <a:solidFill>
+                  <a:srgbClr val="5B6B8C"/>
+                </a:solidFill>
+                <a:latin typeface="Calibri"/>
+              </a:rPr>
+              <a:t>THMS integrates SendGrid to handle all outbound transactional email. Used to send appointment confirmations, password reset links, billing receipts, and doctor notification alerts — ensuring reliable, high-deliverability communication with patients and staff.</a:t>
+            </a:r>
+            <a:endParaRPr/>
+          </a:p>
+        </p:txBody>
+      </p:sp>
+    </p:spTree>
+  </p:cSld>
+  <p:clrMapOvr>
+    <a:masterClrMapping/>
+  </p:clrMapOvr>
+  <mc:AlternateContent xmlns:mc="http://schemas.openxmlformats.org/markup-compatibility/2006">
+    <mc:Choice xmlns:p14="http://schemas.microsoft.com/office/powerpoint/2010/main" Requires="p14">
+      <p:transition p14:dur="2000" advClick="1"/>
+    </mc:Choice>
+    <mc:Fallback>
+      <p:transition advClick="1"/>
+    </mc:Fallback>
+  </mc:AlternateContent>
+</p:sld>
+</file>
+
+<file path=ppt/slides/slide6.xml><?xml version="1.0" encoding="utf-8"?>
+<p:sld xmlns:a="http://schemas.openxmlformats.org/drawingml/2006/main" xmlns:r="http://schemas.openxmlformats.org/officeDocument/2006/relationships" xmlns:p="http://schemas.openxmlformats.org/presentationml/2006/main" xmlns:m="http://schemas.openxmlformats.org/officeDocument/2006/math" xmlns:w="http://schemas.openxmlformats.org/wordprocessingml/2006/main" showMasterPhAnim="0" show="1">
   <p:cSld name="Slide 5">
     <p:bg>
       <p:bgPr shadeToTitle="0">
@@ -9334,7 +13130,7 @@
 </p:sld>
 </file>
 
-<file path=ppt/slides/slide6.xml><?xml version="1.0" encoding="utf-8"?>
+<file path=ppt/slides/slide7.xml><?xml version="1.0" encoding="utf-8"?>
 <p:sld xmlns:a="http://schemas.openxmlformats.org/drawingml/2006/main" xmlns:r="http://schemas.openxmlformats.org/officeDocument/2006/relationships" xmlns:p="http://schemas.openxmlformats.org/presentationml/2006/main" xmlns:m="http://schemas.openxmlformats.org/officeDocument/2006/math" xmlns:w="http://schemas.openxmlformats.org/wordprocessingml/2006/main" showMasterPhAnim="0" show="1">
   <p:cSld name="Slide 6">
     <p:bg>
@@ -9917,7 +13713,7 @@
 </p:sld>
 </file>
 
-<file path=ppt/slides/slide7.xml><?xml version="1.0" encoding="utf-8"?>
+<file path=ppt/slides/slide8.xml><?xml version="1.0" encoding="utf-8"?>
 <p:sld xmlns:a="http://schemas.openxmlformats.org/drawingml/2006/main" xmlns:r="http://schemas.openxmlformats.org/officeDocument/2006/relationships" xmlns:p="http://schemas.openxmlformats.org/presentationml/2006/main" xmlns:m="http://schemas.openxmlformats.org/officeDocument/2006/math" xmlns:w="http://schemas.openxmlformats.org/wordprocessingml/2006/main" showMasterPhAnim="0" show="1">
   <p:cSld name="Slide 7">
     <p:bg>
@@ -10943,7 +14739,7 @@
 </p:sld>
 </file>
 
-<file path=ppt/slides/slide8.xml><?xml version="1.0" encoding="utf-8"?>
+<file path=ppt/slides/slide9.xml><?xml version="1.0" encoding="utf-8"?>
 <p:sld xmlns:a="http://schemas.openxmlformats.org/drawingml/2006/main" xmlns:r="http://schemas.openxmlformats.org/officeDocument/2006/relationships" xmlns:p="http://schemas.openxmlformats.org/presentationml/2006/main" xmlns:m="http://schemas.openxmlformats.org/officeDocument/2006/math" xmlns:w="http://schemas.openxmlformats.org/wordprocessingml/2006/main" showMasterPhAnim="0" show="1">
   <p:cSld name="Slide 8">
     <p:bg>
@@ -11626,829 +15422,6 @@
               <a:t>Never diagnoses, prescribes, or shows numeric confidence to users</a:t>
             </a:r>
             <a:endParaRPr lang="en-US" sz="1200"/>
-          </a:p>
-        </p:txBody>
-      </p:sp>
-    </p:spTree>
-  </p:cSld>
-  <p:clrMapOvr>
-    <a:masterClrMapping/>
-  </p:clrMapOvr>
-  <mc:AlternateContent xmlns:mc="http://schemas.openxmlformats.org/markup-compatibility/2006">
-    <mc:Choice xmlns:p14="http://schemas.microsoft.com/office/powerpoint/2010/main" Requires="p14">
-      <p:transition p14:dur="2000" advClick="1"/>
-    </mc:Choice>
-    <mc:Fallback>
-      <p:transition advClick="1"/>
-    </mc:Fallback>
-  </mc:AlternateContent>
-</p:sld>
-</file>
-
-<file path=ppt/slides/slide9.xml><?xml version="1.0" encoding="utf-8"?>
-<p:sld xmlns:a="http://schemas.openxmlformats.org/drawingml/2006/main" xmlns:r="http://schemas.openxmlformats.org/officeDocument/2006/relationships" xmlns:p="http://schemas.openxmlformats.org/presentationml/2006/main" xmlns:m="http://schemas.openxmlformats.org/officeDocument/2006/math" xmlns:w="http://schemas.openxmlformats.org/wordprocessingml/2006/main" showMasterPhAnim="0" show="1">
-  <p:cSld name="Slide 9">
-    <p:bg>
-      <p:bgPr shadeToTitle="0">
-        <a:solidFill>
-          <a:srgbClr val="FFFFFF"/>
-        </a:solidFill>
-      </p:bgPr>
-    </p:bg>
-    <p:spTree>
-      <p:nvGrpSpPr>
-        <p:cNvPr id="1" name=""/>
-        <p:cNvGrpSpPr/>
-        <p:nvPr/>
-      </p:nvGrpSpPr>
-      <p:grpSpPr bwMode="auto">
-        <a:xfrm>
-          <a:off x="0" y="0"/>
-          <a:ext cx="0" cy="0"/>
-          <a:chOff x="0" y="0"/>
-          <a:chExt cx="0" cy="0"/>
-        </a:xfrm>
-      </p:grpSpPr>
-      <p:sp>
-        <p:nvSpPr>
-          <p:cNvPr id="2" name="Text 0"/>
-          <p:cNvSpPr/>
-          <p:nvPr/>
-        </p:nvSpPr>
-        <p:spPr bwMode="auto">
-          <a:xfrm>
-            <a:off x="548640" y="365760"/>
-            <a:ext cx="9144000" cy="640080"/>
-          </a:xfrm>
-          <a:prstGeom prst="rect">
-            <a:avLst/>
-          </a:prstGeom>
-          <a:noFill/>
-          <a:ln/>
-        </p:spPr>
-        <p:txBody>
-          <a:bodyPr wrap="square" rtlCol="0" anchor="ctr"/>
-          <a:lstStyle/>
-          <a:p>
-            <a:pPr marL="0" indent="0">
-              <a:buNone/>
-              <a:defRPr/>
-            </a:pPr>
-            <a:r>
-              <a:rPr lang="en-US" sz="3000" b="1">
-                <a:solidFill>
-                  <a:srgbClr val="1E2761"/>
-                </a:solidFill>
-                <a:latin typeface="Cambria"/>
-                <a:ea typeface="Cambria"/>
-                <a:cs typeface="Cambria"/>
-              </a:rPr>
-              <a:t>MRI Classifier: Results &amp; Findings</a:t>
-            </a:r>
-            <a:endParaRPr lang="en-US" sz="3000"/>
-          </a:p>
-        </p:txBody>
-      </p:sp>
-      <p:sp>
-        <p:nvSpPr>
-          <p:cNvPr id="3" name="Shape 1"/>
-          <p:cNvSpPr/>
-          <p:nvPr/>
-        </p:nvSpPr>
-        <p:spPr bwMode="auto">
-          <a:xfrm>
-            <a:off x="548640" y="1188720"/>
-            <a:ext cx="3291840" cy="5029200"/>
-          </a:xfrm>
-          <a:prstGeom prst="roundRect">
-            <a:avLst>
-              <a:gd name="adj" fmla="val 2222"/>
-            </a:avLst>
-          </a:prstGeom>
-          <a:solidFill>
-            <a:srgbClr val="1E2761"/>
-          </a:solidFill>
-          <a:ln/>
-        </p:spPr>
-      </p:sp>
-      <p:sp>
-        <p:nvSpPr>
-          <p:cNvPr id="4" name="Text 2"/>
-          <p:cNvSpPr/>
-          <p:nvPr/>
-        </p:nvSpPr>
-        <p:spPr bwMode="auto">
-          <a:xfrm>
-            <a:off x="548640" y="1737360"/>
-            <a:ext cx="3291840" cy="1188720"/>
-          </a:xfrm>
-          <a:prstGeom prst="rect">
-            <a:avLst/>
-          </a:prstGeom>
-          <a:noFill/>
-          <a:ln/>
-        </p:spPr>
-        <p:txBody>
-          <a:bodyPr wrap="square" rtlCol="0" anchor="ctr"/>
-          <a:lstStyle/>
-          <a:p>
-            <a:pPr marL="0" indent="0" algn="ctr">
-              <a:buNone/>
-              <a:defRPr/>
-            </a:pPr>
-            <a:r>
-              <a:rPr lang="en-US" sz="6000" b="1">
-                <a:solidFill>
-                  <a:srgbClr val="FFFFFF"/>
-                </a:solidFill>
-                <a:latin typeface="Cambria"/>
-                <a:ea typeface="Cambria"/>
-                <a:cs typeface="Cambria"/>
-              </a:rPr>
-              <a:t>94.8%</a:t>
-            </a:r>
-            <a:endParaRPr lang="en-US" sz="6000"/>
-          </a:p>
-        </p:txBody>
-      </p:sp>
-      <p:sp>
-        <p:nvSpPr>
-          <p:cNvPr id="5" name="Text 3"/>
-          <p:cNvSpPr/>
-          <p:nvPr/>
-        </p:nvSpPr>
-        <p:spPr bwMode="auto">
-          <a:xfrm>
-            <a:off x="548640" y="2788920"/>
-            <a:ext cx="3291840" cy="365760"/>
-          </a:xfrm>
-          <a:prstGeom prst="rect">
-            <a:avLst/>
-          </a:prstGeom>
-          <a:noFill/>
-          <a:ln/>
-        </p:spPr>
-        <p:txBody>
-          <a:bodyPr wrap="square" rtlCol="0" anchor="ctr"/>
-          <a:lstStyle/>
-          <a:p>
-            <a:pPr marL="0" indent="0" algn="ctr">
-              <a:buNone/>
-              <a:defRPr/>
-            </a:pPr>
-            <a:r>
-              <a:rPr lang="en-US" sz="1500">
-                <a:solidFill>
-                  <a:srgbClr val="CADCFC"/>
-                </a:solidFill>
-                <a:latin typeface="Calibri"/>
-                <a:ea typeface="Calibri"/>
-                <a:cs typeface="Calibri"/>
-              </a:rPr>
-              <a:t>Overall Accuracy</a:t>
-            </a:r>
-            <a:endParaRPr lang="en-US" sz="1500"/>
-          </a:p>
-        </p:txBody>
-      </p:sp>
-      <p:sp>
-        <p:nvSpPr>
-          <p:cNvPr id="6" name="Text 4"/>
-          <p:cNvSpPr/>
-          <p:nvPr/>
-        </p:nvSpPr>
-        <p:spPr bwMode="auto">
-          <a:xfrm>
-            <a:off x="685800" y="3383280"/>
-            <a:ext cx="3017519" cy="914400"/>
-          </a:xfrm>
-          <a:prstGeom prst="rect">
-            <a:avLst/>
-          </a:prstGeom>
-          <a:noFill/>
-          <a:ln/>
-        </p:spPr>
-        <p:txBody>
-          <a:bodyPr wrap="square" rtlCol="0" anchor="ctr"/>
-          <a:lstStyle/>
-          <a:p>
-            <a:pPr marL="0" indent="0" algn="ctr">
-              <a:buNone/>
-              <a:defRPr/>
-            </a:pPr>
-            <a:r>
-              <a:rPr lang="en-US" sz="1200">
-                <a:solidFill>
-                  <a:srgbClr val="CADCFC"/>
-                </a:solidFill>
-                <a:latin typeface="Calibri"/>
-                <a:ea typeface="Calibri"/>
-                <a:cs typeface="Calibri"/>
-              </a:rPr>
-              <a:t>1,516 / 1,600 correctly</a:t>
-            </a:r>
-            <a:endParaRPr lang="en-US" sz="1200"/>
-          </a:p>
-          <a:p>
-            <a:pPr marL="0" indent="0" algn="ctr">
-              <a:buNone/>
-              <a:defRPr/>
-            </a:pPr>
-            <a:r>
-              <a:rPr lang="en-US" sz="1200">
-                <a:solidFill>
-                  <a:srgbClr val="CADCFC"/>
-                </a:solidFill>
-                <a:latin typeface="Calibri"/>
-                <a:ea typeface="Calibri"/>
-                <a:cs typeface="Calibri"/>
-              </a:rPr>
-              <a:t>classified on the held-out</a:t>
-            </a:r>
-            <a:endParaRPr lang="en-US" sz="1200"/>
-          </a:p>
-          <a:p>
-            <a:pPr marL="0" indent="0" algn="ctr">
-              <a:buNone/>
-              <a:defRPr/>
-            </a:pPr>
-            <a:r>
-              <a:rPr lang="en-US" sz="1200">
-                <a:solidFill>
-                  <a:srgbClr val="CADCFC"/>
-                </a:solidFill>
-                <a:latin typeface="Calibri"/>
-                <a:ea typeface="Calibri"/>
-                <a:cs typeface="Calibri"/>
-              </a:rPr>
-              <a:t>test set (84 errors)</a:t>
-            </a:r>
-            <a:endParaRPr lang="en-US" sz="1200"/>
-          </a:p>
-        </p:txBody>
-      </p:sp>
-      <p:sp>
-        <p:nvSpPr>
-          <p:cNvPr id="7" name="Shape 5"/>
-          <p:cNvSpPr/>
-          <p:nvPr/>
-        </p:nvSpPr>
-        <p:spPr bwMode="auto">
-          <a:xfrm>
-            <a:off x="914400" y="4480560"/>
-            <a:ext cx="2377440" cy="0"/>
-          </a:xfrm>
-          <a:prstGeom prst="line">
-            <a:avLst/>
-          </a:prstGeom>
-          <a:noFill/>
-          <a:ln w="12700">
-            <a:solidFill>
-              <a:srgbClr val="4F5C9E"/>
-            </a:solidFill>
-            <a:prstDash val="solid"/>
-          </a:ln>
-        </p:spPr>
-      </p:sp>
-      <p:sp>
-        <p:nvSpPr>
-          <p:cNvPr id="8" name="Text 6"/>
-          <p:cNvSpPr/>
-          <p:nvPr/>
-        </p:nvSpPr>
-        <p:spPr bwMode="auto">
-          <a:xfrm>
-            <a:off x="548640" y="4617720"/>
-            <a:ext cx="3291840" cy="731520"/>
-          </a:xfrm>
-          <a:prstGeom prst="rect">
-            <a:avLst/>
-          </a:prstGeom>
-          <a:noFill/>
-          <a:ln/>
-        </p:spPr>
-        <p:txBody>
-          <a:bodyPr wrap="square" rtlCol="0" anchor="ctr"/>
-          <a:lstStyle/>
-          <a:p>
-            <a:pPr marL="0" indent="0" algn="ctr">
-              <a:buNone/>
-              <a:defRPr/>
-            </a:pPr>
-            <a:r>
-              <a:rPr lang="en-US" sz="3600" b="1">
-                <a:solidFill>
-                  <a:srgbClr val="02C39A"/>
-                </a:solidFill>
-                <a:latin typeface="Cambria"/>
-                <a:ea typeface="Cambria"/>
-                <a:cs typeface="Cambria"/>
-              </a:rPr>
-              <a:t>99.3%</a:t>
-            </a:r>
-            <a:endParaRPr lang="en-US" sz="3600"/>
-          </a:p>
-        </p:txBody>
-      </p:sp>
-      <p:sp>
-        <p:nvSpPr>
-          <p:cNvPr id="9" name="Text 7"/>
-          <p:cNvSpPr/>
-          <p:nvPr/>
-        </p:nvSpPr>
-        <p:spPr bwMode="auto">
-          <a:xfrm>
-            <a:off x="685800" y="5349240"/>
-            <a:ext cx="3017519" cy="731520"/>
-          </a:xfrm>
-          <a:prstGeom prst="rect">
-            <a:avLst/>
-          </a:prstGeom>
-          <a:noFill/>
-          <a:ln/>
-        </p:spPr>
-        <p:txBody>
-          <a:bodyPr wrap="square" rtlCol="0" anchor="ctr"/>
-          <a:lstStyle/>
-          <a:p>
-            <a:pPr marL="0" indent="0" algn="ctr">
-              <a:buNone/>
-              <a:defRPr/>
-            </a:pPr>
-            <a:r>
-              <a:rPr lang="en-US" sz="1150">
-                <a:solidFill>
-                  <a:srgbClr val="CADCFC"/>
-                </a:solidFill>
-                <a:latin typeface="Calibri"/>
-                <a:ea typeface="Calibri"/>
-                <a:cs typeface="Calibri"/>
-              </a:rPr>
-              <a:t>Recall on 'notumor' class — the most</a:t>
-            </a:r>
-            <a:endParaRPr lang="en-US" sz="1150"/>
-          </a:p>
-          <a:p>
-            <a:pPr marL="0" indent="0" algn="ctr">
-              <a:buNone/>
-              <a:defRPr/>
-            </a:pPr>
-            <a:r>
-              <a:rPr lang="en-US" sz="1150">
-                <a:solidFill>
-                  <a:srgbClr val="CADCFC"/>
-                </a:solidFill>
-                <a:latin typeface="Calibri"/>
-                <a:ea typeface="Calibri"/>
-                <a:cs typeface="Calibri"/>
-              </a:rPr>
-              <a:t>clinically critical metric</a:t>
-            </a:r>
-            <a:endParaRPr lang="en-US" sz="1150"/>
-          </a:p>
-        </p:txBody>
-      </p:sp>
-      <p:sp>
-        <p:nvSpPr>
-          <p:cNvPr id="10" name="Text 8"/>
-          <p:cNvSpPr/>
-          <p:nvPr/>
-        </p:nvSpPr>
-        <p:spPr bwMode="auto">
-          <a:xfrm>
-            <a:off x="4069080" y="1188720"/>
-            <a:ext cx="3657600" cy="365760"/>
-          </a:xfrm>
-          <a:prstGeom prst="rect">
-            <a:avLst/>
-          </a:prstGeom>
-          <a:noFill/>
-          <a:ln/>
-        </p:spPr>
-        <p:txBody>
-          <a:bodyPr wrap="square" rtlCol="0" anchor="ctr"/>
-          <a:lstStyle/>
-          <a:p>
-            <a:pPr marL="0" indent="0">
-              <a:buNone/>
-              <a:defRPr/>
-            </a:pPr>
-            <a:r>
-              <a:rPr lang="en-US" sz="1600" b="1">
-                <a:solidFill>
-                  <a:srgbClr val="1E2761"/>
-                </a:solidFill>
-                <a:latin typeface="Cambria"/>
-                <a:ea typeface="Cambria"/>
-                <a:cs typeface="Cambria"/>
-              </a:rPr>
-              <a:t>Backbone Comparison</a:t>
-            </a:r>
-            <a:endParaRPr lang="en-US" sz="1600"/>
-          </a:p>
-        </p:txBody>
-      </p:sp>
-      <p:graphicFrame>
-        <p:nvGraphicFramePr>
-          <p:cNvPr id="11" name="Chart 0" descr=""/>
-          <p:cNvGraphicFramePr>
-            <a:graphicFrameLocks xmlns:a="http://schemas.openxmlformats.org/drawingml/2006/main"/>
-          </p:cNvGraphicFramePr>
-          <p:nvPr/>
-        </p:nvGraphicFramePr>
-        <p:xfrm>
-          <a:off x="4069080" y="1600200"/>
-          <a:ext cx="3657600" cy="2468880"/>
-        </p:xfrm>
-        <a:graphic>
-          <a:graphicData uri="http://schemas.openxmlformats.org/drawingml/2006/chart">
-            <c:chart xmlns:c="http://schemas.openxmlformats.org/drawingml/2006/chart" xmlns:r="http://schemas.openxmlformats.org/officeDocument/2006/relationships" r:id="rId2"/>
-          </a:graphicData>
-        </a:graphic>
-      </p:graphicFrame>
-      <p:sp>
-        <p:nvSpPr>
-          <p:cNvPr id="12" name="Text 9"/>
-          <p:cNvSpPr/>
-          <p:nvPr/>
-        </p:nvSpPr>
-        <p:spPr bwMode="auto">
-          <a:xfrm>
-            <a:off x="4069080" y="4160519"/>
-            <a:ext cx="3657600" cy="640080"/>
-          </a:xfrm>
-          <a:prstGeom prst="rect">
-            <a:avLst/>
-          </a:prstGeom>
-          <a:noFill/>
-          <a:ln/>
-        </p:spPr>
-        <p:txBody>
-          <a:bodyPr wrap="square" rtlCol="0" anchor="ctr"/>
-          <a:lstStyle/>
-          <a:p>
-            <a:pPr marL="0" indent="0">
-              <a:buNone/>
-              <a:defRPr/>
-            </a:pPr>
-            <a:r>
-              <a:rPr lang="en-US" sz="1100" i="1">
-                <a:solidFill>
-                  <a:srgbClr val="5B6B8C"/>
-                </a:solidFill>
-                <a:latin typeface="Calibri"/>
-                <a:ea typeface="Calibri"/>
-                <a:cs typeface="Calibri"/>
-              </a:rPr>
-              <a:t>EfficientNet-B0: highest accuracy with ~2.7× fewer parameters than ResNet-18 (5.3M).</a:t>
-            </a:r>
-            <a:endParaRPr lang="en-US" sz="1100"/>
-          </a:p>
-        </p:txBody>
-      </p:sp>
-      <p:sp>
-        <p:nvSpPr>
-          <p:cNvPr id="13" name="Text 10"/>
-          <p:cNvSpPr/>
-          <p:nvPr/>
-        </p:nvSpPr>
-        <p:spPr bwMode="auto">
-          <a:xfrm>
-            <a:off x="8001000" y="1188720"/>
-            <a:ext cx="3657600" cy="365760"/>
-          </a:xfrm>
-          <a:prstGeom prst="rect">
-            <a:avLst/>
-          </a:prstGeom>
-          <a:noFill/>
-          <a:ln/>
-        </p:spPr>
-        <p:txBody>
-          <a:bodyPr wrap="square" rtlCol="0" anchor="ctr"/>
-          <a:lstStyle/>
-          <a:p>
-            <a:pPr marL="0" indent="0">
-              <a:buNone/>
-              <a:defRPr/>
-            </a:pPr>
-            <a:r>
-              <a:rPr lang="en-US" sz="1600" b="1">
-                <a:solidFill>
-                  <a:srgbClr val="1E2761"/>
-                </a:solidFill>
-                <a:latin typeface="Cambria"/>
-                <a:ea typeface="Cambria"/>
-                <a:cs typeface="Cambria"/>
-              </a:rPr>
-              <a:t>Key Findings</a:t>
-            </a:r>
-            <a:endParaRPr lang="en-US" sz="1600"/>
-          </a:p>
-        </p:txBody>
-      </p:sp>
-      <p:sp>
-        <p:nvSpPr>
-          <p:cNvPr id="14" name="Shape 11"/>
-          <p:cNvSpPr/>
-          <p:nvPr/>
-        </p:nvSpPr>
-        <p:spPr bwMode="auto">
-          <a:xfrm>
-            <a:off x="8001000" y="1645920"/>
-            <a:ext cx="3611880" cy="1463040"/>
-          </a:xfrm>
-          <a:prstGeom prst="roundRect">
-            <a:avLst>
-              <a:gd name="adj" fmla="val 3750"/>
-            </a:avLst>
-          </a:prstGeom>
-          <a:solidFill>
-            <a:srgbClr val="F4F7FE"/>
-          </a:solidFill>
-          <a:ln/>
-        </p:spPr>
-      </p:sp>
-      <p:sp>
-        <p:nvSpPr>
-          <p:cNvPr id="15" name="Text 12"/>
-          <p:cNvSpPr/>
-          <p:nvPr/>
-        </p:nvSpPr>
-        <p:spPr bwMode="auto">
-          <a:xfrm>
-            <a:off x="8183880" y="1755648"/>
-            <a:ext cx="3291840" cy="365760"/>
-          </a:xfrm>
-          <a:prstGeom prst="rect">
-            <a:avLst/>
-          </a:prstGeom>
-          <a:noFill/>
-          <a:ln/>
-        </p:spPr>
-        <p:txBody>
-          <a:bodyPr wrap="square" rtlCol="0" anchor="ctr"/>
-          <a:lstStyle/>
-          <a:p>
-            <a:pPr marL="0" indent="0">
-              <a:buNone/>
-              <a:defRPr/>
-            </a:pPr>
-            <a:r>
-              <a:rPr lang="en-US" sz="1250" b="1">
-                <a:solidFill>
-                  <a:srgbClr val="1E2761"/>
-                </a:solidFill>
-                <a:latin typeface="Calibri"/>
-                <a:ea typeface="Calibri"/>
-                <a:cs typeface="Calibri"/>
-              </a:rPr>
-              <a:t>Safety-first error profile</a:t>
-            </a:r>
-            <a:endParaRPr lang="en-US" sz="1250"/>
-          </a:p>
-        </p:txBody>
-      </p:sp>
-      <p:sp>
-        <p:nvSpPr>
-          <p:cNvPr id="16" name="Text 13"/>
-          <p:cNvSpPr/>
-          <p:nvPr/>
-        </p:nvSpPr>
-        <p:spPr bwMode="auto">
-          <a:xfrm>
-            <a:off x="8183880" y="2148840"/>
-            <a:ext cx="3291840" cy="914400"/>
-          </a:xfrm>
-          <a:prstGeom prst="rect">
-            <a:avLst/>
-          </a:prstGeom>
-          <a:noFill/>
-          <a:ln/>
-        </p:spPr>
-        <p:txBody>
-          <a:bodyPr wrap="square" rtlCol="0" anchor="ctr"/>
-          <a:lstStyle/>
-          <a:p>
-            <a:pPr marL="0" indent="0">
-              <a:buNone/>
-              <a:defRPr/>
-            </a:pPr>
-            <a:r>
-              <a:rPr lang="en-US" sz="1050">
-                <a:solidFill>
-                  <a:srgbClr val="5B6B8C"/>
-                </a:solidFill>
-                <a:latin typeface="Calibri"/>
-                <a:ea typeface="Calibri"/>
-                <a:cs typeface="Calibri"/>
-              </a:rPr>
-              <a:t>99.3% recall on notumor minimizes the most harmful false negatives.</a:t>
-            </a:r>
-            <a:endParaRPr lang="en-US" sz="1050"/>
-          </a:p>
-        </p:txBody>
-      </p:sp>
-      <p:sp>
-        <p:nvSpPr>
-          <p:cNvPr id="17" name="Shape 14"/>
-          <p:cNvSpPr/>
-          <p:nvPr/>
-        </p:nvSpPr>
-        <p:spPr bwMode="auto">
-          <a:xfrm>
-            <a:off x="8001000" y="3246120"/>
-            <a:ext cx="3611880" cy="1463040"/>
-          </a:xfrm>
-          <a:prstGeom prst="roundRect">
-            <a:avLst>
-              <a:gd name="adj" fmla="val 3750"/>
-            </a:avLst>
-          </a:prstGeom>
-          <a:solidFill>
-            <a:srgbClr val="F4F7FE"/>
-          </a:solidFill>
-          <a:ln/>
-        </p:spPr>
-      </p:sp>
-      <p:sp>
-        <p:nvSpPr>
-          <p:cNvPr id="18" name="Text 15"/>
-          <p:cNvSpPr/>
-          <p:nvPr/>
-        </p:nvSpPr>
-        <p:spPr bwMode="auto">
-          <a:xfrm>
-            <a:off x="8183880" y="3355848"/>
-            <a:ext cx="3291840" cy="365760"/>
-          </a:xfrm>
-          <a:prstGeom prst="rect">
-            <a:avLst/>
-          </a:prstGeom>
-          <a:noFill/>
-          <a:ln/>
-        </p:spPr>
-        <p:txBody>
-          <a:bodyPr wrap="square" rtlCol="0" anchor="ctr"/>
-          <a:lstStyle/>
-          <a:p>
-            <a:pPr marL="0" indent="0">
-              <a:buNone/>
-              <a:defRPr/>
-            </a:pPr>
-            <a:r>
-              <a:rPr lang="en-US" sz="1250" b="1">
-                <a:solidFill>
-                  <a:srgbClr val="1E2761"/>
-                </a:solidFill>
-                <a:latin typeface="Calibri"/>
-                <a:ea typeface="Calibri"/>
-                <a:cs typeface="Calibri"/>
-              </a:rPr>
-              <a:t>Glioma↔Meningioma confusion</a:t>
-            </a:r>
-            <a:endParaRPr lang="en-US" sz="1250"/>
-          </a:p>
-        </p:txBody>
-      </p:sp>
-      <p:sp>
-        <p:nvSpPr>
-          <p:cNvPr id="19" name="Text 16"/>
-          <p:cNvSpPr/>
-          <p:nvPr/>
-        </p:nvSpPr>
-        <p:spPr bwMode="auto">
-          <a:xfrm>
-            <a:off x="8183880" y="3749040"/>
-            <a:ext cx="3291840" cy="914400"/>
-          </a:xfrm>
-          <a:prstGeom prst="rect">
-            <a:avLst/>
-          </a:prstGeom>
-          <a:noFill/>
-          <a:ln/>
-        </p:spPr>
-        <p:txBody>
-          <a:bodyPr wrap="square" rtlCol="0" anchor="ctr"/>
-          <a:lstStyle/>
-          <a:p>
-            <a:pPr marL="0" indent="0">
-              <a:buNone/>
-              <a:defRPr/>
-            </a:pPr>
-            <a:r>
-              <a:rPr lang="en-US" sz="1050">
-                <a:solidFill>
-                  <a:srgbClr val="5B6B8C"/>
-                </a:solidFill>
-                <a:latin typeface="Calibri"/>
-                <a:ea typeface="Calibri"/>
-                <a:cs typeface="Calibri"/>
-              </a:rPr>
-              <a:t>Most of the 84 errors reflect genuine visual similarity, mirroring real radiologist difficulty.</a:t>
-            </a:r>
-            <a:endParaRPr lang="en-US" sz="1050"/>
-          </a:p>
-        </p:txBody>
-      </p:sp>
-      <p:sp>
-        <p:nvSpPr>
-          <p:cNvPr id="20" name="Shape 17"/>
-          <p:cNvSpPr/>
-          <p:nvPr/>
-        </p:nvSpPr>
-        <p:spPr bwMode="auto">
-          <a:xfrm>
-            <a:off x="8001000" y="4846320"/>
-            <a:ext cx="3611880" cy="1463040"/>
-          </a:xfrm>
-          <a:prstGeom prst="roundRect">
-            <a:avLst>
-              <a:gd name="adj" fmla="val 3750"/>
-            </a:avLst>
-          </a:prstGeom>
-          <a:solidFill>
-            <a:srgbClr val="F4F7FE"/>
-          </a:solidFill>
-          <a:ln/>
-        </p:spPr>
-      </p:sp>
-      <p:sp>
-        <p:nvSpPr>
-          <p:cNvPr id="21" name="Text 18"/>
-          <p:cNvSpPr/>
-          <p:nvPr/>
-        </p:nvSpPr>
-        <p:spPr bwMode="auto">
-          <a:xfrm>
-            <a:off x="8183880" y="4956048"/>
-            <a:ext cx="3291840" cy="365760"/>
-          </a:xfrm>
-          <a:prstGeom prst="rect">
-            <a:avLst/>
-          </a:prstGeom>
-          <a:noFill/>
-          <a:ln/>
-        </p:spPr>
-        <p:txBody>
-          <a:bodyPr wrap="square" rtlCol="0" anchor="ctr"/>
-          <a:lstStyle/>
-          <a:p>
-            <a:pPr marL="0" indent="0">
-              <a:buNone/>
-              <a:defRPr/>
-            </a:pPr>
-            <a:r>
-              <a:rPr lang="en-US" sz="1250" b="1">
-                <a:solidFill>
-                  <a:srgbClr val="1E2761"/>
-                </a:solidFill>
-                <a:latin typeface="Calibri"/>
-                <a:ea typeface="Calibri"/>
-                <a:cs typeface="Calibri"/>
-              </a:rPr>
-              <a:t>Overconfidence on errors</a:t>
-            </a:r>
-            <a:endParaRPr lang="en-US" sz="1250"/>
-          </a:p>
-        </p:txBody>
-      </p:sp>
-      <p:sp>
-        <p:nvSpPr>
-          <p:cNvPr id="22" name="Text 19"/>
-          <p:cNvSpPr/>
-          <p:nvPr/>
-        </p:nvSpPr>
-        <p:spPr bwMode="auto">
-          <a:xfrm>
-            <a:off x="8183880" y="5349240"/>
-            <a:ext cx="3291840" cy="914400"/>
-          </a:xfrm>
-          <a:prstGeom prst="rect">
-            <a:avLst/>
-          </a:prstGeom>
-          <a:noFill/>
-          <a:ln/>
-        </p:spPr>
-        <p:txBody>
-          <a:bodyPr wrap="square" rtlCol="0" anchor="ctr"/>
-          <a:lstStyle/>
-          <a:p>
-            <a:pPr marL="0" indent="0">
-              <a:buNone/>
-              <a:defRPr/>
-            </a:pPr>
-            <a:r>
-              <a:rPr lang="en-US" sz="1050">
-                <a:solidFill>
-                  <a:srgbClr val="5B6B8C"/>
-                </a:solidFill>
-                <a:latin typeface="Calibri"/>
-                <a:ea typeface="Calibri"/>
-                <a:cs typeface="Calibri"/>
-              </a:rPr>
-              <a:t>Cross-entropy loss yields sharp, miscalibrated probabilities — confidence is never shown to users.</a:t>
-            </a:r>
-            <a:endParaRPr lang="en-US" sz="1050"/>
           </a:p>
         </p:txBody>
       </p:sp>
